--- a/UKA_networks_interpretation_guide.pptx
+++ b/UKA_networks_interpretation_guide.pptx
@@ -6,16 +6,17 @@
     <p:sldMasterId id="2147483652" r:id="rId2"/>
   </p:sldMasterIdLst>
   <p:notesMasterIdLst>
-    <p:notesMasterId r:id="rId10"/>
+    <p:notesMasterId r:id="rId11"/>
   </p:notesMasterIdLst>
   <p:sldIdLst>
     <p:sldId id="338" r:id="rId3"/>
-    <p:sldId id="334" r:id="rId4"/>
+    <p:sldId id="340" r:id="rId4"/>
     <p:sldId id="336" r:id="rId5"/>
     <p:sldId id="335" r:id="rId6"/>
-    <p:sldId id="337" r:id="rId7"/>
-    <p:sldId id="305" r:id="rId8"/>
-    <p:sldId id="333" r:id="rId9"/>
+    <p:sldId id="339" r:id="rId7"/>
+    <p:sldId id="337" r:id="rId8"/>
+    <p:sldId id="305" r:id="rId9"/>
+    <p:sldId id="333" r:id="rId10"/>
   </p:sldIdLst>
   <p:sldSz cx="12192000" cy="6858000"/>
   <p:notesSz cx="6858000" cy="9144000"/>
@@ -120,9 +121,10 @@
         <p14:section name="Default Section" id="{B5EC45B4-B961-4AAD-9397-45B13DCB17CE}">
           <p14:sldIdLst>
             <p14:sldId id="338"/>
-            <p14:sldId id="334"/>
+            <p14:sldId id="340"/>
             <p14:sldId id="336"/>
             <p14:sldId id="335"/>
+            <p14:sldId id="339"/>
             <p14:sldId id="337"/>
             <p14:sldId id="305"/>
             <p14:sldId id="333"/>
@@ -219,7 +221,7 @@
           <a:p>
             <a:fld id="{7AEF12A7-50D3-4D43-91D9-48F476D9C378}" type="datetimeFigureOut">
               <a:rPr lang="en-NL" smtClean="0"/>
-              <a:t>06/03/2026</a:t>
+              <a:t>10/03/2026</a:t>
             </a:fld>
             <a:endParaRPr lang="en-NL"/>
           </a:p>
@@ -1936,7 +1938,7 @@
                 <a:ea typeface="Calibri Light" panose="020F0302020204030204" pitchFamily="34" charset="0"/>
                 <a:cs typeface="Calibri Light" panose="020F0302020204030204" pitchFamily="34" charset="0"/>
               </a:rPr>
-              <a:t>Kinase networks</a:t>
+              <a:t>Kinase networks and pathways</a:t>
             </a:r>
             <a:endParaRPr lang="en-NL" dirty="0">
               <a:latin typeface="Calibri Light" panose="020F0302020204030204" pitchFamily="34" charset="0"/>
@@ -1964,7 +1966,13 @@
   <p:cSld>
     <p:spTree>
       <p:nvGrpSpPr>
-        <p:cNvPr id="1" name=""/>
+        <p:cNvPr id="1" name="">
+          <a:extLst>
+            <a:ext uri="{FF2B5EF4-FFF2-40B4-BE49-F238E27FC236}">
+              <a16:creationId xmlns:a16="http://schemas.microsoft.com/office/drawing/2014/main" id="{37ACF91A-7648-E700-8F7C-F6781834F972}"/>
+            </a:ext>
+          </a:extLst>
+        </p:cNvPr>
         <p:cNvGrpSpPr/>
         <p:nvPr/>
       </p:nvGrpSpPr>
@@ -1978,35 +1986,10 @@
       </p:grpSpPr>
       <p:sp>
         <p:nvSpPr>
-          <p:cNvPr id="2" name="Content Placeholder 1">
-            <a:extLst>
-              <a:ext uri="{FF2B5EF4-FFF2-40B4-BE49-F238E27FC236}">
-                <a16:creationId xmlns:a16="http://schemas.microsoft.com/office/drawing/2014/main" id="{43CDC345-0430-2BA9-DDFB-6420E9FB55F7}"/>
-              </a:ext>
-            </a:extLst>
-          </p:cNvPr>
-          <p:cNvSpPr>
-            <a:spLocks noGrp="1"/>
-          </p:cNvSpPr>
-          <p:nvPr>
-            <p:ph sz="quarter" idx="11"/>
-          </p:nvPr>
-        </p:nvSpPr>
-        <p:spPr/>
-        <p:txBody>
-          <a:bodyPr/>
-          <a:lstStyle/>
-          <a:p>
-            <a:endParaRPr lang="en-NL"/>
-          </a:p>
-        </p:txBody>
-      </p:sp>
-      <p:sp>
-        <p:nvSpPr>
           <p:cNvPr id="3" name="Content Placeholder 2">
             <a:extLst>
               <a:ext uri="{FF2B5EF4-FFF2-40B4-BE49-F238E27FC236}">
-                <a16:creationId xmlns:a16="http://schemas.microsoft.com/office/drawing/2014/main" id="{9B3A6310-287E-D3A9-B840-4EF3CA41EFBA}"/>
+                <a16:creationId xmlns:a16="http://schemas.microsoft.com/office/drawing/2014/main" id="{8A4422EE-9F92-9B0C-4FCC-805D5877BBA5}"/>
               </a:ext>
             </a:extLst>
           </p:cNvPr>
@@ -2048,7 +2031,7 @@
           <p:cNvPr id="5" name="TextBox 4">
             <a:extLst>
               <a:ext uri="{FF2B5EF4-FFF2-40B4-BE49-F238E27FC236}">
-                <a16:creationId xmlns:a16="http://schemas.microsoft.com/office/drawing/2014/main" id="{9F8020C5-512A-D995-5F95-924887355AB1}"/>
+                <a16:creationId xmlns:a16="http://schemas.microsoft.com/office/drawing/2014/main" id="{4D3C3773-5895-9A5F-BC42-DBF57542CA6B}"/>
               </a:ext>
             </a:extLst>
           </p:cNvPr>
@@ -2057,8 +2040,8 @@
         </p:nvSpPr>
         <p:spPr>
           <a:xfrm>
-            <a:off x="524124" y="1251361"/>
-            <a:ext cx="10857237" cy="4401205"/>
+            <a:off x="604583" y="1068319"/>
+            <a:ext cx="5270697" cy="400110"/>
           </a:xfrm>
           <a:prstGeom prst="rect">
             <a:avLst/>
@@ -2077,7 +2060,7 @@
                 <a:ea typeface="Aptos" panose="020B0004020202020204" pitchFamily="34" charset="0"/>
                 <a:cs typeface="Times New Roman" panose="02020603050405020304" pitchFamily="18" charset="0"/>
               </a:rPr>
-              <a:t>Network generation</a:t>
+              <a:t>How are networks generated?</a:t>
             </a:r>
             <a:r>
               <a:rPr lang="hu-HU" sz="2000" dirty="0">
@@ -2085,221 +2068,57 @@
                 <a:ea typeface="Aptos" panose="020B0004020202020204" pitchFamily="34" charset="0"/>
                 <a:cs typeface="Times New Roman" panose="02020603050405020304" pitchFamily="18" charset="0"/>
               </a:rPr>
-              <a:t>: </a:t>
+              <a:t> </a:t>
             </a:r>
           </a:p>
+        </p:txBody>
+      </p:sp>
+      <p:sp>
+        <p:nvSpPr>
+          <p:cNvPr id="6" name="TextBox 5">
+            <a:extLst>
+              <a:ext uri="{FF2B5EF4-FFF2-40B4-BE49-F238E27FC236}">
+                <a16:creationId xmlns:a16="http://schemas.microsoft.com/office/drawing/2014/main" id="{60DED814-811B-21F1-89F1-CDD78F81333E}"/>
+              </a:ext>
+            </a:extLst>
+          </p:cNvPr>
+          <p:cNvSpPr txBox="1"/>
+          <p:nvPr/>
+        </p:nvSpPr>
+        <p:spPr>
+          <a:xfrm>
+            <a:off x="405036" y="5972059"/>
+            <a:ext cx="11235559" cy="523220"/>
+          </a:xfrm>
+          <a:prstGeom prst="rect">
+            <a:avLst/>
+          </a:prstGeom>
+          <a:noFill/>
+        </p:spPr>
+        <p:txBody>
+          <a:bodyPr wrap="square">
+            <a:spAutoFit/>
+          </a:bodyPr>
+          <a:lstStyle/>
           <a:p>
-            <a:pPr marL="285750" indent="-285750">
-              <a:buFont typeface="Arial" panose="020B0604020202020204" pitchFamily="34" charset="0"/>
-              <a:buChar char="•"/>
-            </a:pPr>
-            <a:r>
-              <a:rPr lang="hu-HU" sz="2000" dirty="0">
-                <a:effectLst/>
+            <a:pPr lvl="0"/>
+            <a:r>
+              <a:rPr lang="hu-HU" sz="1400" b="1" dirty="0">
                 <a:latin typeface="Aptos" panose="020B0004020202020204" pitchFamily="34" charset="0"/>
                 <a:ea typeface="Aptos" panose="020B0004020202020204" pitchFamily="34" charset="0"/>
                 <a:cs typeface="Times New Roman" panose="02020603050405020304" pitchFamily="18" charset="0"/>
               </a:rPr>
-              <a:t>Networks are generated from high </a:t>
-            </a:r>
-            <a:r>
-              <a:rPr lang="hu-HU" sz="2000" dirty="0">
+              <a:t>*Params.csv</a:t>
+            </a:r>
+            <a:r>
+              <a:rPr lang="hu-HU" sz="1400" dirty="0">
                 <a:latin typeface="Aptos" panose="020B0004020202020204" pitchFamily="34" charset="0"/>
                 <a:ea typeface="Aptos" panose="020B0004020202020204" pitchFamily="34" charset="0"/>
                 <a:cs typeface="Times New Roman" panose="02020603050405020304" pitchFamily="18" charset="0"/>
               </a:rPr>
-              <a:t>scoring* kinases. N</a:t>
-            </a:r>
-            <a:r>
-              <a:rPr lang="en-NL" sz="2000" dirty="0" err="1">
-                <a:latin typeface="Aptos" panose="020B0004020202020204" pitchFamily="34" charset="0"/>
-              </a:rPr>
-              <a:t>etwork</a:t>
-            </a:r>
-            <a:r>
-              <a:rPr lang="hu-HU" sz="2000" dirty="0">
-                <a:latin typeface="Aptos" panose="020B0004020202020204" pitchFamily="34" charset="0"/>
-              </a:rPr>
-              <a:t>s</a:t>
-            </a:r>
-            <a:r>
-              <a:rPr lang="en-NL" sz="2000" dirty="0">
-                <a:latin typeface="Aptos" panose="020B0004020202020204" pitchFamily="34" charset="0"/>
-              </a:rPr>
-              <a:t> connect key kinases through high-confidence links and may </a:t>
-            </a:r>
-            <a:r>
-              <a:rPr lang="hu-HU" sz="2000" dirty="0">
-                <a:latin typeface="Aptos" panose="020B0004020202020204" pitchFamily="34" charset="0"/>
-              </a:rPr>
-              <a:t>include </a:t>
-            </a:r>
-            <a:r>
-              <a:rPr lang="en-NL" sz="2000" dirty="0">
-                <a:latin typeface="Aptos" panose="020B0004020202020204" pitchFamily="34" charset="0"/>
-              </a:rPr>
-              <a:t>high confidence connector nodes which are not in the data</a:t>
-            </a:r>
-            <a:r>
-              <a:rPr lang="hu-HU" sz="2000" dirty="0">
-                <a:latin typeface="Aptos" panose="020B0004020202020204" pitchFamily="34" charset="0"/>
-              </a:rPr>
-              <a:t>.</a:t>
-            </a:r>
-            <a:endParaRPr lang="hu-HU" sz="2000" dirty="0">
-              <a:latin typeface="Aptos" panose="020B0004020202020204" pitchFamily="34" charset="0"/>
-              <a:ea typeface="Aptos" panose="020B0004020202020204" pitchFamily="34" charset="0"/>
-              <a:cs typeface="Times New Roman" panose="02020603050405020304" pitchFamily="18" charset="0"/>
-            </a:endParaRPr>
-          </a:p>
-          <a:p>
-            <a:pPr marL="285750" indent="-285750">
-              <a:buFont typeface="Arial" panose="020B0604020202020204" pitchFamily="34" charset="0"/>
-              <a:buChar char="•"/>
-            </a:pPr>
-            <a:r>
-              <a:rPr lang="hu-HU" sz="2000" dirty="0">
-                <a:latin typeface="Aptos" panose="020B0004020202020204" pitchFamily="34" charset="0"/>
-                <a:ea typeface="Aptos" panose="020B0004020202020204" pitchFamily="34" charset="0"/>
-                <a:cs typeface="Times New Roman" panose="02020603050405020304" pitchFamily="18" charset="0"/>
-              </a:rPr>
-              <a:t>Pathway annotation is done by EnrichR, using the </a:t>
-            </a:r>
-            <a:r>
-              <a:rPr lang="hu-HU" sz="2000" dirty="0">
-                <a:latin typeface="Aptos" panose="020B0004020202020204" pitchFamily="34" charset="0"/>
-                <a:ea typeface="Aptos" panose="020B0004020202020204" pitchFamily="34" charset="0"/>
-                <a:cs typeface="Times New Roman" panose="02020603050405020304" pitchFamily="18" charset="0"/>
-                <a:hlinkClick r:id="rId2"/>
-              </a:rPr>
-              <a:t>Reactome</a:t>
-            </a:r>
-            <a:r>
-              <a:rPr lang="hu-HU" sz="2000" dirty="0">
-                <a:latin typeface="Aptos" panose="020B0004020202020204" pitchFamily="34" charset="0"/>
-                <a:ea typeface="Aptos" panose="020B0004020202020204" pitchFamily="34" charset="0"/>
-                <a:cs typeface="Times New Roman" panose="02020603050405020304" pitchFamily="18" charset="0"/>
-              </a:rPr>
-              <a:t> db, for each node cluster in the network. </a:t>
-            </a:r>
-            <a:endParaRPr lang="en-NL" sz="2000" dirty="0">
-              <a:latin typeface="Aptos" panose="020B0004020202020204" pitchFamily="34" charset="0"/>
-              <a:ea typeface="Aptos" panose="020B0004020202020204" pitchFamily="34" charset="0"/>
-              <a:cs typeface="Times New Roman" panose="02020603050405020304" pitchFamily="18" charset="0"/>
-            </a:endParaRPr>
-          </a:p>
-          <a:p>
-            <a:pPr lvl="0"/>
-            <a:endParaRPr lang="hu-HU" sz="2000" dirty="0">
-              <a:effectLst/>
-              <a:latin typeface="Aptos" panose="020B0004020202020204" pitchFamily="34" charset="0"/>
-              <a:ea typeface="Aptos" panose="020B0004020202020204" pitchFamily="34" charset="0"/>
-              <a:cs typeface="Times New Roman" panose="02020603050405020304" pitchFamily="18" charset="0"/>
-            </a:endParaRPr>
-          </a:p>
-          <a:p>
-            <a:pPr lvl="0"/>
-            <a:r>
-              <a:rPr lang="hu-HU" sz="2000" b="1" dirty="0">
-                <a:effectLst/>
-                <a:latin typeface="Aptos" panose="020B0004020202020204" pitchFamily="34" charset="0"/>
-                <a:ea typeface="Aptos" panose="020B0004020202020204" pitchFamily="34" charset="0"/>
-                <a:cs typeface="Times New Roman" panose="02020603050405020304" pitchFamily="18" charset="0"/>
-              </a:rPr>
-              <a:t>Most important network files</a:t>
-            </a:r>
-          </a:p>
-          <a:p>
-            <a:pPr marL="342900" lvl="0" indent="-342900">
-              <a:buFont typeface="Aptos" panose="020B0004020202020204" pitchFamily="34" charset="0"/>
-              <a:buChar char="-"/>
-            </a:pPr>
-            <a:r>
-              <a:rPr lang="hu-HU" sz="2000" b="1" dirty="0">
-                <a:effectLst/>
-                <a:latin typeface="Aptos" panose="020B0004020202020204" pitchFamily="34" charset="0"/>
-                <a:ea typeface="Aptos" panose="020B0004020202020204" pitchFamily="34" charset="0"/>
-                <a:cs typeface="Times New Roman" panose="02020603050405020304" pitchFamily="18" charset="0"/>
-              </a:rPr>
-              <a:t>Network html: </a:t>
-            </a:r>
-            <a:r>
-              <a:rPr lang="hu-HU" sz="2000" dirty="0">
-                <a:effectLst/>
-                <a:latin typeface="Aptos" panose="020B0004020202020204" pitchFamily="34" charset="0"/>
-                <a:ea typeface="Aptos" panose="020B0004020202020204" pitchFamily="34" charset="0"/>
-                <a:cs typeface="Times New Roman" panose="02020603050405020304" pitchFamily="18" charset="0"/>
-              </a:rPr>
-              <a:t>an interactive network figure which shows the Kinase Statistic of nodes (red: high, green: low) and the pathways. Nodes and pathways are searchable.</a:t>
-            </a:r>
-          </a:p>
-          <a:p>
-            <a:pPr marL="342900" lvl="0" indent="-342900">
-              <a:buFont typeface="Aptos" panose="020B0004020202020204" pitchFamily="34" charset="0"/>
-              <a:buChar char="-"/>
-            </a:pPr>
-            <a:r>
-              <a:rPr lang="hu-HU" sz="2000" b="1" dirty="0">
-                <a:effectLst/>
-                <a:latin typeface="Aptos" panose="020B0004020202020204" pitchFamily="34" charset="0"/>
-                <a:ea typeface="Aptos" panose="020B0004020202020204" pitchFamily="34" charset="0"/>
-                <a:cs typeface="Times New Roman" panose="02020603050405020304" pitchFamily="18" charset="0"/>
-              </a:rPr>
-              <a:t>Enrich_results: pathways of the network </a:t>
-            </a:r>
-            <a:r>
-              <a:rPr lang="hu-HU" sz="2000" dirty="0">
-                <a:effectLst/>
-                <a:latin typeface="Aptos" panose="020B0004020202020204" pitchFamily="34" charset="0"/>
-                <a:ea typeface="Aptos" panose="020B0004020202020204" pitchFamily="34" charset="0"/>
-                <a:cs typeface="Times New Roman" panose="02020603050405020304" pitchFamily="18" charset="0"/>
-              </a:rPr>
-              <a:t>– </a:t>
-            </a:r>
-            <a:r>
-              <a:rPr lang="hu-HU" sz="2000" dirty="0">
-                <a:solidFill>
-                  <a:srgbClr val="00B050"/>
-                </a:solidFill>
-                <a:effectLst/>
-                <a:latin typeface="Aptos" panose="020B0004020202020204" pitchFamily="34" charset="0"/>
-                <a:ea typeface="Aptos" panose="020B0004020202020204" pitchFamily="34" charset="0"/>
-                <a:cs typeface="Times New Roman" panose="02020603050405020304" pitchFamily="18" charset="0"/>
-              </a:rPr>
-              <a:t>see next slide</a:t>
-            </a:r>
-            <a:endParaRPr lang="hu-HU" sz="2000" b="1" dirty="0">
-              <a:solidFill>
-                <a:srgbClr val="00B050"/>
-              </a:solidFill>
-              <a:effectLst/>
-              <a:latin typeface="Aptos" panose="020B0004020202020204" pitchFamily="34" charset="0"/>
-              <a:ea typeface="Aptos" panose="020B0004020202020204" pitchFamily="34" charset="0"/>
-              <a:cs typeface="Times New Roman" panose="02020603050405020304" pitchFamily="18" charset="0"/>
-            </a:endParaRPr>
-          </a:p>
-          <a:p>
-            <a:pPr marL="342900" lvl="0" indent="-342900">
-              <a:buFont typeface="Aptos" panose="020B0004020202020204" pitchFamily="34" charset="0"/>
-              <a:buChar char="-"/>
-            </a:pPr>
-            <a:r>
-              <a:rPr lang="hu-HU" sz="2000" b="1" dirty="0">
-                <a:latin typeface="Aptos" panose="020B0004020202020204" pitchFamily="34" charset="0"/>
-                <a:ea typeface="Aptos" panose="020B0004020202020204" pitchFamily="34" charset="0"/>
-                <a:cs typeface="Times New Roman" panose="02020603050405020304" pitchFamily="18" charset="0"/>
-              </a:rPr>
-              <a:t>*Params.csv</a:t>
-            </a:r>
-            <a:r>
-              <a:rPr lang="hu-HU" sz="2000" dirty="0">
-                <a:latin typeface="Aptos" panose="020B0004020202020204" pitchFamily="34" charset="0"/>
-                <a:ea typeface="Aptos" panose="020B0004020202020204" pitchFamily="34" charset="0"/>
-                <a:cs typeface="Times New Roman" panose="02020603050405020304" pitchFamily="18" charset="0"/>
-              </a:rPr>
-              <a:t>: shows how the data was pre-filtered. fscore_cutoff is the threshold for specificity score. perc_cutoffs are the threshold(s) for percentile, which is usually 0.01 (shown at the end of the filename as _p01) so everything is used above the specificity cutoff.</a:t>
-            </a:r>
-            <a:endParaRPr lang="en-NL" sz="2000" dirty="0">
+              <a:t>: shows how the data was pre-filtered. spec_cutoff is the threshold for specificity score. perc_cutoffs are the threshold(s) for percentile, which is usually 0.01 (shown at the end of the filename as _p01) so everything is used above the specificity cutoff.</a:t>
+            </a:r>
+            <a:endParaRPr lang="en-NL" sz="1400" dirty="0">
               <a:effectLst/>
               <a:latin typeface="Aptos" panose="020B0004020202020204" pitchFamily="34" charset="0"/>
               <a:ea typeface="Aptos" panose="020B0004020202020204" pitchFamily="34" charset="0"/>
@@ -2308,10 +2127,1514 @@
           </a:p>
         </p:txBody>
       </p:sp>
+      <p:grpSp>
+        <p:nvGrpSpPr>
+          <p:cNvPr id="46" name="Group 45">
+            <a:extLst>
+              <a:ext uri="{FF2B5EF4-FFF2-40B4-BE49-F238E27FC236}">
+                <a16:creationId xmlns:a16="http://schemas.microsoft.com/office/drawing/2014/main" id="{5938F589-AEA5-A756-2575-849C46C0D131}"/>
+              </a:ext>
+            </a:extLst>
+          </p:cNvPr>
+          <p:cNvGrpSpPr/>
+          <p:nvPr/>
+        </p:nvGrpSpPr>
+        <p:grpSpPr>
+          <a:xfrm>
+            <a:off x="1178980" y="2873752"/>
+            <a:ext cx="3761913" cy="1474336"/>
+            <a:chOff x="10108049" y="1022211"/>
+            <a:chExt cx="3761913" cy="1474336"/>
+          </a:xfrm>
+        </p:grpSpPr>
+        <p:sp>
+          <p:nvSpPr>
+            <p:cNvPr id="30" name="Oval 29">
+              <a:extLst>
+                <a:ext uri="{FF2B5EF4-FFF2-40B4-BE49-F238E27FC236}">
+                  <a16:creationId xmlns:a16="http://schemas.microsoft.com/office/drawing/2014/main" id="{37B07289-AD7F-3C63-A65C-FF7BA4ADF121}"/>
+                </a:ext>
+              </a:extLst>
+            </p:cNvPr>
+            <p:cNvSpPr/>
+            <p:nvPr/>
+          </p:nvSpPr>
+          <p:spPr>
+            <a:xfrm>
+              <a:off x="12112827" y="1413756"/>
+              <a:ext cx="192311" cy="192461"/>
+            </a:xfrm>
+            <a:prstGeom prst="ellipse">
+              <a:avLst/>
+            </a:prstGeom>
+            <a:solidFill>
+              <a:schemeClr val="accent5">
+                <a:lumMod val="60000"/>
+                <a:lumOff val="40000"/>
+              </a:schemeClr>
+            </a:solidFill>
+            <a:ln w="12700">
+              <a:solidFill>
+                <a:schemeClr val="tx1">
+                  <a:lumMod val="75000"/>
+                  <a:lumOff val="25000"/>
+                </a:schemeClr>
+              </a:solidFill>
+            </a:ln>
+          </p:spPr>
+          <p:style>
+            <a:lnRef idx="2">
+              <a:schemeClr val="accent1">
+                <a:shade val="15000"/>
+              </a:schemeClr>
+            </a:lnRef>
+            <a:fillRef idx="1">
+              <a:schemeClr val="accent1"/>
+            </a:fillRef>
+            <a:effectRef idx="0">
+              <a:schemeClr val="accent1"/>
+            </a:effectRef>
+            <a:fontRef idx="minor">
+              <a:schemeClr val="lt1"/>
+            </a:fontRef>
+          </p:style>
+          <p:txBody>
+            <a:bodyPr rtlCol="0" anchor="ctr"/>
+            <a:lstStyle/>
+            <a:p>
+              <a:pPr algn="ctr"/>
+              <a:endParaRPr lang="en-NL"/>
+            </a:p>
+          </p:txBody>
+        </p:sp>
+        <p:sp>
+          <p:nvSpPr>
+            <p:cNvPr id="31" name="TextBox 30">
+              <a:extLst>
+                <a:ext uri="{FF2B5EF4-FFF2-40B4-BE49-F238E27FC236}">
+                  <a16:creationId xmlns:a16="http://schemas.microsoft.com/office/drawing/2014/main" id="{FFA01698-50E9-496C-4E55-14786E62B6F3}"/>
+                </a:ext>
+              </a:extLst>
+            </p:cNvPr>
+            <p:cNvSpPr txBox="1"/>
+            <p:nvPr/>
+          </p:nvSpPr>
+          <p:spPr>
+            <a:xfrm>
+              <a:off x="12347199" y="1368555"/>
+              <a:ext cx="1522763" cy="346344"/>
+            </a:xfrm>
+            <a:prstGeom prst="rect">
+              <a:avLst/>
+            </a:prstGeom>
+            <a:noFill/>
+          </p:spPr>
+          <p:txBody>
+            <a:bodyPr wrap="square">
+              <a:spAutoFit/>
+            </a:bodyPr>
+            <a:lstStyle/>
+            <a:p>
+              <a:pPr>
+                <a:spcAft>
+                  <a:spcPts val="600"/>
+                </a:spcAft>
+              </a:pPr>
+              <a:r>
+                <a:rPr lang="hu-HU" sz="1600" dirty="0">
+                  <a:solidFill>
+                    <a:schemeClr val="tx1"/>
+                  </a:solidFill>
+                  <a:latin typeface="Aptos" panose="020B0004020202020204" pitchFamily="34" charset="0"/>
+                </a:rPr>
+                <a:t>Hidden node</a:t>
+              </a:r>
+              <a:endParaRPr lang="en-NL" sz="1600" dirty="0">
+                <a:solidFill>
+                  <a:schemeClr val="tx1"/>
+                </a:solidFill>
+                <a:latin typeface="Aptos" panose="020B0004020202020204" pitchFamily="34" charset="0"/>
+              </a:endParaRPr>
+            </a:p>
+          </p:txBody>
+        </p:sp>
+        <p:sp>
+          <p:nvSpPr>
+            <p:cNvPr id="32" name="Oval 31">
+              <a:extLst>
+                <a:ext uri="{FF2B5EF4-FFF2-40B4-BE49-F238E27FC236}">
+                  <a16:creationId xmlns:a16="http://schemas.microsoft.com/office/drawing/2014/main" id="{03B5FD28-882E-1CDE-EACE-3718A170F08B}"/>
+                </a:ext>
+              </a:extLst>
+            </p:cNvPr>
+            <p:cNvSpPr/>
+            <p:nvPr/>
+          </p:nvSpPr>
+          <p:spPr>
+            <a:xfrm>
+              <a:off x="12089562" y="1099153"/>
+              <a:ext cx="192311" cy="192461"/>
+            </a:xfrm>
+            <a:prstGeom prst="ellipse">
+              <a:avLst/>
+            </a:prstGeom>
+            <a:solidFill>
+              <a:schemeClr val="accent6">
+                <a:lumMod val="60000"/>
+                <a:lumOff val="40000"/>
+              </a:schemeClr>
+            </a:solidFill>
+            <a:ln w="12700">
+              <a:solidFill>
+                <a:schemeClr val="tx1">
+                  <a:lumMod val="75000"/>
+                  <a:lumOff val="25000"/>
+                </a:schemeClr>
+              </a:solidFill>
+            </a:ln>
+          </p:spPr>
+          <p:style>
+            <a:lnRef idx="2">
+              <a:schemeClr val="accent1">
+                <a:shade val="15000"/>
+              </a:schemeClr>
+            </a:lnRef>
+            <a:fillRef idx="1">
+              <a:schemeClr val="accent1"/>
+            </a:fillRef>
+            <a:effectRef idx="0">
+              <a:schemeClr val="accent1"/>
+            </a:effectRef>
+            <a:fontRef idx="minor">
+              <a:schemeClr val="lt1"/>
+            </a:fontRef>
+          </p:style>
+          <p:txBody>
+            <a:bodyPr rtlCol="0" anchor="ctr"/>
+            <a:lstStyle/>
+            <a:p>
+              <a:pPr algn="ctr"/>
+              <a:endParaRPr lang="en-NL"/>
+            </a:p>
+          </p:txBody>
+        </p:sp>
+        <p:sp>
+          <p:nvSpPr>
+            <p:cNvPr id="33" name="TextBox 32">
+              <a:extLst>
+                <a:ext uri="{FF2B5EF4-FFF2-40B4-BE49-F238E27FC236}">
+                  <a16:creationId xmlns:a16="http://schemas.microsoft.com/office/drawing/2014/main" id="{37C28EA1-6935-3D94-87AC-F4C2D199116E}"/>
+                </a:ext>
+              </a:extLst>
+            </p:cNvPr>
+            <p:cNvSpPr txBox="1"/>
+            <p:nvPr/>
+          </p:nvSpPr>
+          <p:spPr>
+            <a:xfrm>
+              <a:off x="12293945" y="1022211"/>
+              <a:ext cx="1522763" cy="346344"/>
+            </a:xfrm>
+            <a:prstGeom prst="rect">
+              <a:avLst/>
+            </a:prstGeom>
+            <a:noFill/>
+          </p:spPr>
+          <p:txBody>
+            <a:bodyPr wrap="square">
+              <a:spAutoFit/>
+            </a:bodyPr>
+            <a:lstStyle/>
+            <a:p>
+              <a:pPr>
+                <a:spcAft>
+                  <a:spcPts val="600"/>
+                </a:spcAft>
+              </a:pPr>
+              <a:r>
+                <a:rPr lang="hu-HU" sz="1600" dirty="0">
+                  <a:solidFill>
+                    <a:schemeClr val="tx1"/>
+                  </a:solidFill>
+                  <a:latin typeface="Aptos" panose="020B0004020202020204" pitchFamily="34" charset="0"/>
+                </a:rPr>
+                <a:t>Kinase node</a:t>
+              </a:r>
+              <a:endParaRPr lang="en-NL" sz="1600" dirty="0">
+                <a:solidFill>
+                  <a:schemeClr val="tx1"/>
+                </a:solidFill>
+                <a:latin typeface="Aptos" panose="020B0004020202020204" pitchFamily="34" charset="0"/>
+              </a:endParaRPr>
+            </a:p>
+          </p:txBody>
+        </p:sp>
+        <p:grpSp>
+          <p:nvGrpSpPr>
+            <p:cNvPr id="37" name="Group 36">
+              <a:extLst>
+                <a:ext uri="{FF2B5EF4-FFF2-40B4-BE49-F238E27FC236}">
+                  <a16:creationId xmlns:a16="http://schemas.microsoft.com/office/drawing/2014/main" id="{988D42E3-FECE-5752-4CB1-AF5677831201}"/>
+                </a:ext>
+              </a:extLst>
+            </p:cNvPr>
+            <p:cNvGrpSpPr/>
+            <p:nvPr/>
+          </p:nvGrpSpPr>
+          <p:grpSpPr>
+            <a:xfrm>
+              <a:off x="10108049" y="1086556"/>
+              <a:ext cx="1624540" cy="1409991"/>
+              <a:chOff x="10153215" y="1585456"/>
+              <a:chExt cx="1624540" cy="1409991"/>
+            </a:xfrm>
+          </p:grpSpPr>
+          <p:sp>
+            <p:nvSpPr>
+              <p:cNvPr id="7" name="Oval 6">
+                <a:extLst>
+                  <a:ext uri="{FF2B5EF4-FFF2-40B4-BE49-F238E27FC236}">
+                    <a16:creationId xmlns:a16="http://schemas.microsoft.com/office/drawing/2014/main" id="{FA2DC977-25A0-D78B-F123-6CC8F7577F50}"/>
+                  </a:ext>
+                </a:extLst>
+              </p:cNvPr>
+              <p:cNvSpPr/>
+              <p:nvPr/>
+            </p:nvSpPr>
+            <p:spPr>
+              <a:xfrm>
+                <a:off x="10153215" y="1585456"/>
+                <a:ext cx="415844" cy="419223"/>
+              </a:xfrm>
+              <a:prstGeom prst="ellipse">
+                <a:avLst/>
+              </a:prstGeom>
+              <a:solidFill>
+                <a:schemeClr val="accent6">
+                  <a:lumMod val="60000"/>
+                  <a:lumOff val="40000"/>
+                </a:schemeClr>
+              </a:solidFill>
+              <a:ln w="12700">
+                <a:solidFill>
+                  <a:schemeClr val="tx1">
+                    <a:lumMod val="75000"/>
+                    <a:lumOff val="25000"/>
+                  </a:schemeClr>
+                </a:solidFill>
+              </a:ln>
+            </p:spPr>
+            <p:style>
+              <a:lnRef idx="2">
+                <a:schemeClr val="accent1">
+                  <a:shade val="15000"/>
+                </a:schemeClr>
+              </a:lnRef>
+              <a:fillRef idx="1">
+                <a:schemeClr val="accent1"/>
+              </a:fillRef>
+              <a:effectRef idx="0">
+                <a:schemeClr val="accent1"/>
+              </a:effectRef>
+              <a:fontRef idx="minor">
+                <a:schemeClr val="lt1"/>
+              </a:fontRef>
+            </p:style>
+            <p:txBody>
+              <a:bodyPr rtlCol="0" anchor="ctr"/>
+              <a:lstStyle/>
+              <a:p>
+                <a:pPr algn="ctr"/>
+                <a:endParaRPr lang="en-NL" dirty="0"/>
+              </a:p>
+            </p:txBody>
+          </p:sp>
+          <p:sp>
+            <p:nvSpPr>
+              <p:cNvPr id="8" name="Oval 7">
+                <a:extLst>
+                  <a:ext uri="{FF2B5EF4-FFF2-40B4-BE49-F238E27FC236}">
+                    <a16:creationId xmlns:a16="http://schemas.microsoft.com/office/drawing/2014/main" id="{9DF0E436-53EA-A391-BBCA-7DB08691E2D4}"/>
+                  </a:ext>
+                </a:extLst>
+              </p:cNvPr>
+              <p:cNvSpPr/>
+              <p:nvPr/>
+            </p:nvSpPr>
+            <p:spPr>
+              <a:xfrm>
+                <a:off x="11026055" y="2094631"/>
+                <a:ext cx="295275" cy="294572"/>
+              </a:xfrm>
+              <a:prstGeom prst="ellipse">
+                <a:avLst/>
+              </a:prstGeom>
+              <a:solidFill>
+                <a:schemeClr val="accent6">
+                  <a:lumMod val="60000"/>
+                  <a:lumOff val="40000"/>
+                </a:schemeClr>
+              </a:solidFill>
+              <a:ln w="12700">
+                <a:solidFill>
+                  <a:schemeClr val="tx1">
+                    <a:lumMod val="75000"/>
+                    <a:lumOff val="25000"/>
+                  </a:schemeClr>
+                </a:solidFill>
+              </a:ln>
+            </p:spPr>
+            <p:style>
+              <a:lnRef idx="2">
+                <a:schemeClr val="accent1">
+                  <a:shade val="15000"/>
+                </a:schemeClr>
+              </a:lnRef>
+              <a:fillRef idx="1">
+                <a:schemeClr val="accent1"/>
+              </a:fillRef>
+              <a:effectRef idx="0">
+                <a:schemeClr val="accent1"/>
+              </a:effectRef>
+              <a:fontRef idx="minor">
+                <a:schemeClr val="lt1"/>
+              </a:fontRef>
+            </p:style>
+            <p:txBody>
+              <a:bodyPr rtlCol="0" anchor="ctr"/>
+              <a:lstStyle/>
+              <a:p>
+                <a:pPr algn="ctr"/>
+                <a:endParaRPr lang="en-NL"/>
+              </a:p>
+            </p:txBody>
+          </p:sp>
+          <p:sp>
+            <p:nvSpPr>
+              <p:cNvPr id="9" name="Oval 8">
+                <a:extLst>
+                  <a:ext uri="{FF2B5EF4-FFF2-40B4-BE49-F238E27FC236}">
+                    <a16:creationId xmlns:a16="http://schemas.microsoft.com/office/drawing/2014/main" id="{93383A03-CB24-5383-ACE9-2623125A4331}"/>
+                  </a:ext>
+                </a:extLst>
+              </p:cNvPr>
+              <p:cNvSpPr/>
+              <p:nvPr/>
+            </p:nvSpPr>
+            <p:spPr>
+              <a:xfrm>
+                <a:off x="10730780" y="1646884"/>
+                <a:ext cx="295275" cy="294572"/>
+              </a:xfrm>
+              <a:prstGeom prst="ellipse">
+                <a:avLst/>
+              </a:prstGeom>
+              <a:solidFill>
+                <a:schemeClr val="accent5">
+                  <a:lumMod val="60000"/>
+                  <a:lumOff val="40000"/>
+                </a:schemeClr>
+              </a:solidFill>
+              <a:ln w="12700">
+                <a:solidFill>
+                  <a:schemeClr val="tx1">
+                    <a:lumMod val="75000"/>
+                    <a:lumOff val="25000"/>
+                  </a:schemeClr>
+                </a:solidFill>
+              </a:ln>
+            </p:spPr>
+            <p:style>
+              <a:lnRef idx="2">
+                <a:schemeClr val="accent1">
+                  <a:shade val="15000"/>
+                </a:schemeClr>
+              </a:lnRef>
+              <a:fillRef idx="1">
+                <a:schemeClr val="accent1"/>
+              </a:fillRef>
+              <a:effectRef idx="0">
+                <a:schemeClr val="accent1"/>
+              </a:effectRef>
+              <a:fontRef idx="minor">
+                <a:schemeClr val="lt1"/>
+              </a:fontRef>
+            </p:style>
+            <p:txBody>
+              <a:bodyPr rtlCol="0" anchor="ctr"/>
+              <a:lstStyle/>
+              <a:p>
+                <a:pPr algn="ctr"/>
+                <a:endParaRPr lang="en-NL" dirty="0">
+                  <a:solidFill>
+                    <a:schemeClr val="tx1"/>
+                  </a:solidFill>
+                  <a:latin typeface="Aptos" panose="020B0004020202020204" pitchFamily="34" charset="0"/>
+                </a:endParaRPr>
+              </a:p>
+            </p:txBody>
+          </p:sp>
+          <p:cxnSp>
+            <p:nvCxnSpPr>
+              <p:cNvPr id="10" name="Straight Connector 9">
+                <a:extLst>
+                  <a:ext uri="{FF2B5EF4-FFF2-40B4-BE49-F238E27FC236}">
+                    <a16:creationId xmlns:a16="http://schemas.microsoft.com/office/drawing/2014/main" id="{34AB5B92-54C4-6582-D33C-BC8FD86B9D4A}"/>
+                  </a:ext>
+                </a:extLst>
+              </p:cNvPr>
+              <p:cNvCxnSpPr>
+                <a:cxnSpLocks/>
+                <a:stCxn id="7" idx="6"/>
+                <a:endCxn id="9" idx="2"/>
+              </p:cNvCxnSpPr>
+              <p:nvPr/>
+            </p:nvCxnSpPr>
+            <p:spPr>
+              <a:xfrm flipV="1">
+                <a:off x="10569059" y="1794170"/>
+                <a:ext cx="161721" cy="898"/>
+              </a:xfrm>
+              <a:prstGeom prst="line">
+                <a:avLst/>
+              </a:prstGeom>
+              <a:ln w="28575">
+                <a:solidFill>
+                  <a:schemeClr val="tx1">
+                    <a:lumMod val="50000"/>
+                    <a:lumOff val="50000"/>
+                  </a:schemeClr>
+                </a:solidFill>
+              </a:ln>
+            </p:spPr>
+            <p:style>
+              <a:lnRef idx="1">
+                <a:schemeClr val="accent1"/>
+              </a:lnRef>
+              <a:fillRef idx="0">
+                <a:schemeClr val="accent1"/>
+              </a:fillRef>
+              <a:effectRef idx="0">
+                <a:schemeClr val="accent1"/>
+              </a:effectRef>
+              <a:fontRef idx="minor">
+                <a:schemeClr val="tx1"/>
+              </a:fontRef>
+            </p:style>
+          </p:cxnSp>
+          <p:cxnSp>
+            <p:nvCxnSpPr>
+              <p:cNvPr id="11" name="Straight Connector 10">
+                <a:extLst>
+                  <a:ext uri="{FF2B5EF4-FFF2-40B4-BE49-F238E27FC236}">
+                    <a16:creationId xmlns:a16="http://schemas.microsoft.com/office/drawing/2014/main" id="{A06B50C3-4C49-59C9-61E6-72ADC38AA686}"/>
+                  </a:ext>
+                </a:extLst>
+              </p:cNvPr>
+              <p:cNvCxnSpPr>
+                <a:cxnSpLocks/>
+                <a:stCxn id="8" idx="0"/>
+                <a:endCxn id="9" idx="5"/>
+              </p:cNvCxnSpPr>
+              <p:nvPr/>
+            </p:nvCxnSpPr>
+            <p:spPr>
+              <a:xfrm flipH="1" flipV="1">
+                <a:off x="10982813" y="1898317"/>
+                <a:ext cx="190880" cy="196314"/>
+              </a:xfrm>
+              <a:prstGeom prst="line">
+                <a:avLst/>
+              </a:prstGeom>
+              <a:ln w="28575">
+                <a:solidFill>
+                  <a:schemeClr val="tx1">
+                    <a:lumMod val="50000"/>
+                    <a:lumOff val="50000"/>
+                  </a:schemeClr>
+                </a:solidFill>
+              </a:ln>
+            </p:spPr>
+            <p:style>
+              <a:lnRef idx="1">
+                <a:schemeClr val="accent1"/>
+              </a:lnRef>
+              <a:fillRef idx="0">
+                <a:schemeClr val="accent1"/>
+              </a:fillRef>
+              <a:effectRef idx="0">
+                <a:schemeClr val="accent1"/>
+              </a:effectRef>
+              <a:fontRef idx="minor">
+                <a:schemeClr val="tx1"/>
+              </a:fontRef>
+            </p:style>
+          </p:cxnSp>
+          <p:cxnSp>
+            <p:nvCxnSpPr>
+              <p:cNvPr id="12" name="Straight Connector 11">
+                <a:extLst>
+                  <a:ext uri="{FF2B5EF4-FFF2-40B4-BE49-F238E27FC236}">
+                    <a16:creationId xmlns:a16="http://schemas.microsoft.com/office/drawing/2014/main" id="{23544CCD-5974-621C-2BB9-7986D2F73B9C}"/>
+                  </a:ext>
+                </a:extLst>
+              </p:cNvPr>
+              <p:cNvCxnSpPr>
+                <a:cxnSpLocks/>
+                <a:stCxn id="8" idx="2"/>
+              </p:cNvCxnSpPr>
+              <p:nvPr/>
+            </p:nvCxnSpPr>
+            <p:spPr>
+              <a:xfrm flipH="1">
+                <a:off x="10786013" y="2241917"/>
+                <a:ext cx="240042" cy="69581"/>
+              </a:xfrm>
+              <a:prstGeom prst="line">
+                <a:avLst/>
+              </a:prstGeom>
+              <a:ln w="28575">
+                <a:solidFill>
+                  <a:schemeClr val="tx1">
+                    <a:lumMod val="50000"/>
+                    <a:lumOff val="50000"/>
+                  </a:schemeClr>
+                </a:solidFill>
+              </a:ln>
+            </p:spPr>
+            <p:style>
+              <a:lnRef idx="1">
+                <a:schemeClr val="accent1"/>
+              </a:lnRef>
+              <a:fillRef idx="0">
+                <a:schemeClr val="accent1"/>
+              </a:fillRef>
+              <a:effectRef idx="0">
+                <a:schemeClr val="accent1"/>
+              </a:effectRef>
+              <a:fontRef idx="minor">
+                <a:schemeClr val="tx1"/>
+              </a:fontRef>
+            </p:style>
+          </p:cxnSp>
+          <p:sp>
+            <p:nvSpPr>
+              <p:cNvPr id="15" name="Oval 14">
+                <a:extLst>
+                  <a:ext uri="{FF2B5EF4-FFF2-40B4-BE49-F238E27FC236}">
+                    <a16:creationId xmlns:a16="http://schemas.microsoft.com/office/drawing/2014/main" id="{877AAA24-E460-98B6-DE5A-8797E7BA559F}"/>
+                  </a:ext>
+                </a:extLst>
+              </p:cNvPr>
+              <p:cNvSpPr/>
+              <p:nvPr/>
+            </p:nvSpPr>
+            <p:spPr>
+              <a:xfrm>
+                <a:off x="10490738" y="2186753"/>
+                <a:ext cx="295275" cy="294572"/>
+              </a:xfrm>
+              <a:prstGeom prst="ellipse">
+                <a:avLst/>
+              </a:prstGeom>
+              <a:solidFill>
+                <a:schemeClr val="accent6">
+                  <a:lumMod val="60000"/>
+                  <a:lumOff val="40000"/>
+                </a:schemeClr>
+              </a:solidFill>
+              <a:ln w="12700">
+                <a:solidFill>
+                  <a:schemeClr val="tx1">
+                    <a:lumMod val="75000"/>
+                    <a:lumOff val="25000"/>
+                  </a:schemeClr>
+                </a:solidFill>
+              </a:ln>
+            </p:spPr>
+            <p:style>
+              <a:lnRef idx="2">
+                <a:schemeClr val="accent1">
+                  <a:shade val="15000"/>
+                </a:schemeClr>
+              </a:lnRef>
+              <a:fillRef idx="1">
+                <a:schemeClr val="accent1"/>
+              </a:fillRef>
+              <a:effectRef idx="0">
+                <a:schemeClr val="accent1"/>
+              </a:effectRef>
+              <a:fontRef idx="minor">
+                <a:schemeClr val="lt1"/>
+              </a:fontRef>
+            </p:style>
+            <p:txBody>
+              <a:bodyPr rtlCol="0" anchor="ctr"/>
+              <a:lstStyle/>
+              <a:p>
+                <a:pPr algn="ctr"/>
+                <a:endParaRPr lang="en-NL"/>
+              </a:p>
+            </p:txBody>
+          </p:sp>
+          <p:sp>
+            <p:nvSpPr>
+              <p:cNvPr id="16" name="Oval 15">
+                <a:extLst>
+                  <a:ext uri="{FF2B5EF4-FFF2-40B4-BE49-F238E27FC236}">
+                    <a16:creationId xmlns:a16="http://schemas.microsoft.com/office/drawing/2014/main" id="{E19CDBC2-B593-1897-F32A-04C1AF219F03}"/>
+                  </a:ext>
+                </a:extLst>
+              </p:cNvPr>
+              <p:cNvSpPr/>
+              <p:nvPr/>
+            </p:nvSpPr>
+            <p:spPr>
+              <a:xfrm>
+                <a:off x="11026055" y="2585226"/>
+                <a:ext cx="430221" cy="410221"/>
+              </a:xfrm>
+              <a:prstGeom prst="ellipse">
+                <a:avLst/>
+              </a:prstGeom>
+              <a:solidFill>
+                <a:schemeClr val="accent6">
+                  <a:lumMod val="60000"/>
+                  <a:lumOff val="40000"/>
+                </a:schemeClr>
+              </a:solidFill>
+              <a:ln w="12700">
+                <a:solidFill>
+                  <a:schemeClr val="tx1">
+                    <a:lumMod val="75000"/>
+                    <a:lumOff val="25000"/>
+                  </a:schemeClr>
+                </a:solidFill>
+              </a:ln>
+            </p:spPr>
+            <p:style>
+              <a:lnRef idx="2">
+                <a:schemeClr val="accent1">
+                  <a:shade val="15000"/>
+                </a:schemeClr>
+              </a:lnRef>
+              <a:fillRef idx="1">
+                <a:schemeClr val="accent1"/>
+              </a:fillRef>
+              <a:effectRef idx="0">
+                <a:schemeClr val="accent1"/>
+              </a:effectRef>
+              <a:fontRef idx="minor">
+                <a:schemeClr val="lt1"/>
+              </a:fontRef>
+            </p:style>
+            <p:txBody>
+              <a:bodyPr rtlCol="0" anchor="ctr"/>
+              <a:lstStyle/>
+              <a:p>
+                <a:pPr algn="ctr"/>
+                <a:endParaRPr lang="en-NL"/>
+              </a:p>
+            </p:txBody>
+          </p:sp>
+          <p:cxnSp>
+            <p:nvCxnSpPr>
+              <p:cNvPr id="17" name="Straight Connector 16">
+                <a:extLst>
+                  <a:ext uri="{FF2B5EF4-FFF2-40B4-BE49-F238E27FC236}">
+                    <a16:creationId xmlns:a16="http://schemas.microsoft.com/office/drawing/2014/main" id="{F02D3913-FD01-E46C-0F79-25EF12E39A9E}"/>
+                  </a:ext>
+                </a:extLst>
+              </p:cNvPr>
+              <p:cNvCxnSpPr>
+                <a:cxnSpLocks/>
+                <a:stCxn id="8" idx="4"/>
+                <a:endCxn id="16" idx="0"/>
+              </p:cNvCxnSpPr>
+              <p:nvPr/>
+            </p:nvCxnSpPr>
+            <p:spPr>
+              <a:xfrm>
+                <a:off x="11173693" y="2389203"/>
+                <a:ext cx="67473" cy="196023"/>
+              </a:xfrm>
+              <a:prstGeom prst="line">
+                <a:avLst/>
+              </a:prstGeom>
+              <a:ln w="28575">
+                <a:solidFill>
+                  <a:schemeClr val="tx1">
+                    <a:lumMod val="50000"/>
+                    <a:lumOff val="50000"/>
+                  </a:schemeClr>
+                </a:solidFill>
+              </a:ln>
+            </p:spPr>
+            <p:style>
+              <a:lnRef idx="1">
+                <a:schemeClr val="accent1"/>
+              </a:lnRef>
+              <a:fillRef idx="0">
+                <a:schemeClr val="accent1"/>
+              </a:fillRef>
+              <a:effectRef idx="0">
+                <a:schemeClr val="accent1"/>
+              </a:effectRef>
+              <a:fontRef idx="minor">
+                <a:schemeClr val="tx1"/>
+              </a:fontRef>
+            </p:style>
+          </p:cxnSp>
+          <p:cxnSp>
+            <p:nvCxnSpPr>
+              <p:cNvPr id="25" name="Straight Connector 24">
+                <a:extLst>
+                  <a:ext uri="{FF2B5EF4-FFF2-40B4-BE49-F238E27FC236}">
+                    <a16:creationId xmlns:a16="http://schemas.microsoft.com/office/drawing/2014/main" id="{4C20E7D7-BF3F-4424-0AA8-5597803FD11B}"/>
+                  </a:ext>
+                </a:extLst>
+              </p:cNvPr>
+              <p:cNvCxnSpPr>
+                <a:cxnSpLocks/>
+                <a:stCxn id="8" idx="6"/>
+                <a:endCxn id="28" idx="1"/>
+              </p:cNvCxnSpPr>
+              <p:nvPr/>
+            </p:nvCxnSpPr>
+            <p:spPr>
+              <a:xfrm>
+                <a:off x="11321330" y="2241917"/>
+                <a:ext cx="261781" cy="37342"/>
+              </a:xfrm>
+              <a:prstGeom prst="line">
+                <a:avLst/>
+              </a:prstGeom>
+              <a:ln w="28575">
+                <a:solidFill>
+                  <a:schemeClr val="tx1">
+                    <a:lumMod val="50000"/>
+                    <a:lumOff val="50000"/>
+                  </a:schemeClr>
+                </a:solidFill>
+              </a:ln>
+            </p:spPr>
+            <p:style>
+              <a:lnRef idx="1">
+                <a:schemeClr val="accent1"/>
+              </a:lnRef>
+              <a:fillRef idx="0">
+                <a:schemeClr val="accent1"/>
+              </a:fillRef>
+              <a:effectRef idx="0">
+                <a:schemeClr val="accent1"/>
+              </a:effectRef>
+              <a:fontRef idx="minor">
+                <a:schemeClr val="tx1"/>
+              </a:fontRef>
+            </p:style>
+          </p:cxnSp>
+          <p:sp>
+            <p:nvSpPr>
+              <p:cNvPr id="28" name="Oval 27">
+                <a:extLst>
+                  <a:ext uri="{FF2B5EF4-FFF2-40B4-BE49-F238E27FC236}">
+                    <a16:creationId xmlns:a16="http://schemas.microsoft.com/office/drawing/2014/main" id="{0857BD67-C69D-E8D8-0A93-A39303DCA4A0}"/>
+                  </a:ext>
+                </a:extLst>
+              </p:cNvPr>
+              <p:cNvSpPr/>
+              <p:nvPr/>
+            </p:nvSpPr>
+            <p:spPr>
+              <a:xfrm>
+                <a:off x="11549715" y="2245324"/>
+                <a:ext cx="228040" cy="231725"/>
+              </a:xfrm>
+              <a:prstGeom prst="ellipse">
+                <a:avLst/>
+              </a:prstGeom>
+              <a:solidFill>
+                <a:schemeClr val="accent6">
+                  <a:lumMod val="60000"/>
+                  <a:lumOff val="40000"/>
+                </a:schemeClr>
+              </a:solidFill>
+              <a:ln w="12700">
+                <a:solidFill>
+                  <a:schemeClr val="tx1">
+                    <a:lumMod val="75000"/>
+                    <a:lumOff val="25000"/>
+                  </a:schemeClr>
+                </a:solidFill>
+              </a:ln>
+            </p:spPr>
+            <p:style>
+              <a:lnRef idx="2">
+                <a:schemeClr val="accent1">
+                  <a:shade val="15000"/>
+                </a:schemeClr>
+              </a:lnRef>
+              <a:fillRef idx="1">
+                <a:schemeClr val="accent1"/>
+              </a:fillRef>
+              <a:effectRef idx="0">
+                <a:schemeClr val="accent1"/>
+              </a:effectRef>
+              <a:fontRef idx="minor">
+                <a:schemeClr val="lt1"/>
+              </a:fontRef>
+            </p:style>
+            <p:txBody>
+              <a:bodyPr rtlCol="0" anchor="ctr"/>
+              <a:lstStyle/>
+              <a:p>
+                <a:pPr algn="ctr"/>
+                <a:endParaRPr lang="en-NL"/>
+              </a:p>
+            </p:txBody>
+          </p:sp>
+          <p:cxnSp>
+            <p:nvCxnSpPr>
+              <p:cNvPr id="34" name="Straight Connector 33">
+                <a:extLst>
+                  <a:ext uri="{FF2B5EF4-FFF2-40B4-BE49-F238E27FC236}">
+                    <a16:creationId xmlns:a16="http://schemas.microsoft.com/office/drawing/2014/main" id="{8176FE1A-58D1-536D-157B-C1199B031B2E}"/>
+                  </a:ext>
+                </a:extLst>
+              </p:cNvPr>
+              <p:cNvCxnSpPr>
+                <a:cxnSpLocks/>
+                <a:stCxn id="28" idx="3"/>
+                <a:endCxn id="16" idx="7"/>
+              </p:cNvCxnSpPr>
+              <p:nvPr/>
+            </p:nvCxnSpPr>
+            <p:spPr>
+              <a:xfrm flipH="1">
+                <a:off x="11393272" y="2443114"/>
+                <a:ext cx="189839" cy="202187"/>
+              </a:xfrm>
+              <a:prstGeom prst="line">
+                <a:avLst/>
+              </a:prstGeom>
+              <a:ln w="28575">
+                <a:solidFill>
+                  <a:schemeClr val="tx1">
+                    <a:lumMod val="50000"/>
+                    <a:lumOff val="50000"/>
+                  </a:schemeClr>
+                </a:solidFill>
+              </a:ln>
+            </p:spPr>
+            <p:style>
+              <a:lnRef idx="1">
+                <a:schemeClr val="accent1"/>
+              </a:lnRef>
+              <a:fillRef idx="0">
+                <a:schemeClr val="accent1"/>
+              </a:fillRef>
+              <a:effectRef idx="0">
+                <a:schemeClr val="accent1"/>
+              </a:effectRef>
+              <a:fontRef idx="minor">
+                <a:schemeClr val="tx1"/>
+              </a:fontRef>
+            </p:style>
+          </p:cxnSp>
+        </p:grpSp>
+      </p:grpSp>
+      <p:sp>
+        <p:nvSpPr>
+          <p:cNvPr id="13" name="TextBox 12">
+            <a:extLst>
+              <a:ext uri="{FF2B5EF4-FFF2-40B4-BE49-F238E27FC236}">
+                <a16:creationId xmlns:a16="http://schemas.microsoft.com/office/drawing/2014/main" id="{7BC09F55-D235-2714-4408-224ED630CEED}"/>
+              </a:ext>
+            </a:extLst>
+          </p:cNvPr>
+          <p:cNvSpPr txBox="1"/>
+          <p:nvPr/>
+        </p:nvSpPr>
+        <p:spPr>
+          <a:xfrm>
+            <a:off x="6801449" y="1230762"/>
+            <a:ext cx="4549721" cy="877163"/>
+          </a:xfrm>
+          <a:prstGeom prst="rect">
+            <a:avLst/>
+          </a:prstGeom>
+          <a:noFill/>
+        </p:spPr>
+        <p:txBody>
+          <a:bodyPr wrap="square">
+            <a:spAutoFit/>
+          </a:bodyPr>
+          <a:lstStyle/>
+          <a:p>
+            <a:r>
+              <a:rPr lang="hu-HU" sz="1700" dirty="0">
+                <a:latin typeface="Aptos" panose="020B0004020202020204" pitchFamily="34" charset="0"/>
+                <a:ea typeface="Aptos" panose="020B0004020202020204" pitchFamily="34" charset="0"/>
+                <a:cs typeface="Times New Roman" panose="02020603050405020304" pitchFamily="18" charset="0"/>
+              </a:rPr>
+              <a:t>In the network, each cluster of nodes is annotated with pathways by EnrichR, using the </a:t>
+            </a:r>
+            <a:r>
+              <a:rPr lang="hu-HU" sz="1700" dirty="0">
+                <a:latin typeface="Aptos" panose="020B0004020202020204" pitchFamily="34" charset="0"/>
+                <a:ea typeface="Aptos" panose="020B0004020202020204" pitchFamily="34" charset="0"/>
+                <a:cs typeface="Times New Roman" panose="02020603050405020304" pitchFamily="18" charset="0"/>
+                <a:hlinkClick r:id="rId2"/>
+              </a:rPr>
+              <a:t>Reactome</a:t>
+            </a:r>
+            <a:r>
+              <a:rPr lang="hu-HU" sz="1700" dirty="0">
+                <a:latin typeface="Aptos" panose="020B0004020202020204" pitchFamily="34" charset="0"/>
+                <a:ea typeface="Aptos" panose="020B0004020202020204" pitchFamily="34" charset="0"/>
+                <a:cs typeface="Times New Roman" panose="02020603050405020304" pitchFamily="18" charset="0"/>
+              </a:rPr>
+              <a:t> db.</a:t>
+            </a:r>
+            <a:endParaRPr lang="en-NL" sz="1700" dirty="0">
+              <a:latin typeface="Aptos" panose="020B0004020202020204" pitchFamily="34" charset="0"/>
+              <a:ea typeface="Aptos" panose="020B0004020202020204" pitchFamily="34" charset="0"/>
+              <a:cs typeface="Times New Roman" panose="02020603050405020304" pitchFamily="18" charset="0"/>
+            </a:endParaRPr>
+          </a:p>
+        </p:txBody>
+      </p:sp>
+      <p:sp>
+        <p:nvSpPr>
+          <p:cNvPr id="18" name="TextBox 17">
+            <a:extLst>
+              <a:ext uri="{FF2B5EF4-FFF2-40B4-BE49-F238E27FC236}">
+                <a16:creationId xmlns:a16="http://schemas.microsoft.com/office/drawing/2014/main" id="{9B6FEB7F-41F6-E9FE-3403-4EDFEC6C6DD2}"/>
+              </a:ext>
+            </a:extLst>
+          </p:cNvPr>
+          <p:cNvSpPr txBox="1"/>
+          <p:nvPr/>
+        </p:nvSpPr>
+        <p:spPr>
+          <a:xfrm>
+            <a:off x="566677" y="1507091"/>
+            <a:ext cx="5308603" cy="1138773"/>
+          </a:xfrm>
+          <a:prstGeom prst="rect">
+            <a:avLst/>
+          </a:prstGeom>
+          <a:noFill/>
+        </p:spPr>
+        <p:txBody>
+          <a:bodyPr wrap="square">
+            <a:spAutoFit/>
+          </a:bodyPr>
+          <a:lstStyle/>
+          <a:p>
+            <a:r>
+              <a:rPr lang="hu-HU" sz="1700" dirty="0">
+                <a:effectLst/>
+                <a:latin typeface="Aptos" panose="020B0004020202020204" pitchFamily="34" charset="0"/>
+                <a:ea typeface="Aptos" panose="020B0004020202020204" pitchFamily="34" charset="0"/>
+                <a:cs typeface="Times New Roman" panose="02020603050405020304" pitchFamily="18" charset="0"/>
+              </a:rPr>
+              <a:t>Networks are generated from high </a:t>
+            </a:r>
+            <a:r>
+              <a:rPr lang="hu-HU" sz="1700" dirty="0">
+                <a:latin typeface="Aptos" panose="020B0004020202020204" pitchFamily="34" charset="0"/>
+                <a:ea typeface="Aptos" panose="020B0004020202020204" pitchFamily="34" charset="0"/>
+                <a:cs typeface="Times New Roman" panose="02020603050405020304" pitchFamily="18" charset="0"/>
+              </a:rPr>
+              <a:t>scoring* kinases. N</a:t>
+            </a:r>
+            <a:r>
+              <a:rPr lang="en-NL" sz="1700" dirty="0" err="1">
+                <a:latin typeface="Aptos" panose="020B0004020202020204" pitchFamily="34" charset="0"/>
+              </a:rPr>
+              <a:t>etwork</a:t>
+            </a:r>
+            <a:r>
+              <a:rPr lang="hu-HU" sz="1700" dirty="0">
+                <a:latin typeface="Aptos" panose="020B0004020202020204" pitchFamily="34" charset="0"/>
+              </a:rPr>
+              <a:t>s</a:t>
+            </a:r>
+            <a:r>
+              <a:rPr lang="en-NL" sz="1700" dirty="0">
+                <a:latin typeface="Aptos" panose="020B0004020202020204" pitchFamily="34" charset="0"/>
+              </a:rPr>
+              <a:t> connect key kinases through high-confidence links and may </a:t>
+            </a:r>
+            <a:r>
+              <a:rPr lang="hu-HU" sz="1700" dirty="0">
+                <a:latin typeface="Aptos" panose="020B0004020202020204" pitchFamily="34" charset="0"/>
+              </a:rPr>
+              <a:t>include </a:t>
+            </a:r>
+            <a:r>
+              <a:rPr lang="en-NL" sz="1700" dirty="0">
+                <a:latin typeface="Aptos" panose="020B0004020202020204" pitchFamily="34" charset="0"/>
+              </a:rPr>
+              <a:t>high confidence connector </a:t>
+            </a:r>
+            <a:r>
+              <a:rPr lang="hu-HU" sz="1700" dirty="0">
+                <a:latin typeface="Aptos" panose="020B0004020202020204" pitchFamily="34" charset="0"/>
+              </a:rPr>
+              <a:t>(hidden) </a:t>
+            </a:r>
+            <a:r>
+              <a:rPr lang="en-NL" sz="1700" dirty="0">
+                <a:latin typeface="Aptos" panose="020B0004020202020204" pitchFamily="34" charset="0"/>
+              </a:rPr>
+              <a:t>nodes which are not in the data</a:t>
+            </a:r>
+            <a:r>
+              <a:rPr lang="hu-HU" sz="1700" dirty="0">
+                <a:latin typeface="Aptos" panose="020B0004020202020204" pitchFamily="34" charset="0"/>
+              </a:rPr>
+              <a:t>.</a:t>
+            </a:r>
+            <a:endParaRPr lang="hu-HU" sz="1700" dirty="0">
+              <a:latin typeface="Aptos" panose="020B0004020202020204" pitchFamily="34" charset="0"/>
+              <a:ea typeface="Aptos" panose="020B0004020202020204" pitchFamily="34" charset="0"/>
+              <a:cs typeface="Times New Roman" panose="02020603050405020304" pitchFamily="18" charset="0"/>
+            </a:endParaRPr>
+          </a:p>
+        </p:txBody>
+      </p:sp>
+      <p:sp>
+        <p:nvSpPr>
+          <p:cNvPr id="20" name="Arrow: Right 19">
+            <a:extLst>
+              <a:ext uri="{FF2B5EF4-FFF2-40B4-BE49-F238E27FC236}">
+                <a16:creationId xmlns:a16="http://schemas.microsoft.com/office/drawing/2014/main" id="{BB91EF46-32B9-F063-4C06-1C452D5F946C}"/>
+              </a:ext>
+            </a:extLst>
+          </p:cNvPr>
+          <p:cNvSpPr/>
+          <p:nvPr/>
+        </p:nvSpPr>
+        <p:spPr>
+          <a:xfrm>
+            <a:off x="5957774" y="3350756"/>
+            <a:ext cx="469481" cy="369488"/>
+          </a:xfrm>
+          <a:prstGeom prst="rightArrow">
+            <a:avLst/>
+          </a:prstGeom>
+          <a:ln>
+            <a:solidFill>
+              <a:schemeClr val="tx1"/>
+            </a:solidFill>
+          </a:ln>
+        </p:spPr>
+        <p:style>
+          <a:lnRef idx="2">
+            <a:schemeClr val="accent1">
+              <a:shade val="15000"/>
+            </a:schemeClr>
+          </a:lnRef>
+          <a:fillRef idx="1">
+            <a:schemeClr val="accent1"/>
+          </a:fillRef>
+          <a:effectRef idx="0">
+            <a:schemeClr val="accent1"/>
+          </a:effectRef>
+          <a:fontRef idx="minor">
+            <a:schemeClr val="lt1"/>
+          </a:fontRef>
+        </p:style>
+        <p:txBody>
+          <a:bodyPr rtlCol="0" anchor="ctr"/>
+          <a:lstStyle/>
+          <a:p>
+            <a:pPr algn="ctr"/>
+            <a:endParaRPr lang="en-NL"/>
+          </a:p>
+        </p:txBody>
+      </p:sp>
+      <p:sp>
+        <p:nvSpPr>
+          <p:cNvPr id="22" name="Rectangle 21">
+            <a:extLst>
+              <a:ext uri="{FF2B5EF4-FFF2-40B4-BE49-F238E27FC236}">
+                <a16:creationId xmlns:a16="http://schemas.microsoft.com/office/drawing/2014/main" id="{3E551400-8D34-F906-6BB7-3737CD6C8315}"/>
+              </a:ext>
+            </a:extLst>
+          </p:cNvPr>
+          <p:cNvSpPr/>
+          <p:nvPr/>
+        </p:nvSpPr>
+        <p:spPr>
+          <a:xfrm>
+            <a:off x="405036" y="1030014"/>
+            <a:ext cx="5470244" cy="4813162"/>
+          </a:xfrm>
+          <a:prstGeom prst="rect">
+            <a:avLst/>
+          </a:prstGeom>
+          <a:noFill/>
+          <a:ln w="12700">
+            <a:solidFill>
+              <a:schemeClr val="tx1"/>
+            </a:solidFill>
+          </a:ln>
+        </p:spPr>
+        <p:style>
+          <a:lnRef idx="2">
+            <a:schemeClr val="accent1">
+              <a:shade val="15000"/>
+            </a:schemeClr>
+          </a:lnRef>
+          <a:fillRef idx="1">
+            <a:schemeClr val="accent1"/>
+          </a:fillRef>
+          <a:effectRef idx="0">
+            <a:schemeClr val="accent1"/>
+          </a:effectRef>
+          <a:fontRef idx="minor">
+            <a:schemeClr val="lt1"/>
+          </a:fontRef>
+        </p:style>
+        <p:txBody>
+          <a:bodyPr rtlCol="0" anchor="ctr"/>
+          <a:lstStyle/>
+          <a:p>
+            <a:pPr algn="ctr"/>
+            <a:endParaRPr lang="en-NL" dirty="0"/>
+          </a:p>
+        </p:txBody>
+      </p:sp>
+      <p:sp>
+        <p:nvSpPr>
+          <p:cNvPr id="23" name="Rectangle 22">
+            <a:extLst>
+              <a:ext uri="{FF2B5EF4-FFF2-40B4-BE49-F238E27FC236}">
+                <a16:creationId xmlns:a16="http://schemas.microsoft.com/office/drawing/2014/main" id="{C78126DA-9564-AF16-026B-7221544D6973}"/>
+              </a:ext>
+            </a:extLst>
+          </p:cNvPr>
+          <p:cNvSpPr/>
+          <p:nvPr/>
+        </p:nvSpPr>
+        <p:spPr>
+          <a:xfrm>
+            <a:off x="6509750" y="1030014"/>
+            <a:ext cx="5319251" cy="4799933"/>
+          </a:xfrm>
+          <a:prstGeom prst="rect">
+            <a:avLst/>
+          </a:prstGeom>
+          <a:noFill/>
+          <a:ln w="12700">
+            <a:solidFill>
+              <a:schemeClr val="tx1"/>
+            </a:solidFill>
+          </a:ln>
+        </p:spPr>
+        <p:style>
+          <a:lnRef idx="2">
+            <a:schemeClr val="accent1">
+              <a:shade val="15000"/>
+            </a:schemeClr>
+          </a:lnRef>
+          <a:fillRef idx="1">
+            <a:schemeClr val="accent1"/>
+          </a:fillRef>
+          <a:effectRef idx="0">
+            <a:schemeClr val="accent1"/>
+          </a:effectRef>
+          <a:fontRef idx="minor">
+            <a:schemeClr val="lt1"/>
+          </a:fontRef>
+        </p:style>
+        <p:txBody>
+          <a:bodyPr rtlCol="0" anchor="ctr"/>
+          <a:lstStyle/>
+          <a:p>
+            <a:pPr algn="ctr"/>
+            <a:endParaRPr lang="en-NL" dirty="0"/>
+          </a:p>
+        </p:txBody>
+      </p:sp>
+      <p:sp>
+        <p:nvSpPr>
+          <p:cNvPr id="27" name="TextBox 26">
+            <a:extLst>
+              <a:ext uri="{FF2B5EF4-FFF2-40B4-BE49-F238E27FC236}">
+                <a16:creationId xmlns:a16="http://schemas.microsoft.com/office/drawing/2014/main" id="{13501040-BB63-022F-F6B9-E1876AA16DE3}"/>
+              </a:ext>
+            </a:extLst>
+          </p:cNvPr>
+          <p:cNvSpPr txBox="1"/>
+          <p:nvPr/>
+        </p:nvSpPr>
+        <p:spPr>
+          <a:xfrm>
+            <a:off x="460031" y="4373934"/>
+            <a:ext cx="5244662" cy="1400383"/>
+          </a:xfrm>
+          <a:prstGeom prst="rect">
+            <a:avLst/>
+          </a:prstGeom>
+          <a:noFill/>
+        </p:spPr>
+        <p:txBody>
+          <a:bodyPr wrap="square">
+            <a:spAutoFit/>
+          </a:bodyPr>
+          <a:lstStyle/>
+          <a:p>
+            <a:pPr lvl="0"/>
+            <a:r>
+              <a:rPr lang="hu-HU" sz="1700" dirty="0">
+                <a:effectLst/>
+                <a:latin typeface="Aptos" panose="020B0004020202020204" pitchFamily="34" charset="0"/>
+                <a:ea typeface="Aptos" panose="020B0004020202020204" pitchFamily="34" charset="0"/>
+                <a:cs typeface="Times New Roman" panose="02020603050405020304" pitchFamily="18" charset="0"/>
+              </a:rPr>
+              <a:t>Files:</a:t>
+            </a:r>
+          </a:p>
+          <a:p>
+            <a:pPr lvl="0"/>
+            <a:r>
+              <a:rPr lang="hu-HU" sz="1700" b="1" dirty="0">
+                <a:effectLst/>
+                <a:latin typeface="Aptos" panose="020B0004020202020204" pitchFamily="34" charset="0"/>
+                <a:ea typeface="Aptos" panose="020B0004020202020204" pitchFamily="34" charset="0"/>
+                <a:cs typeface="Times New Roman" panose="02020603050405020304" pitchFamily="18" charset="0"/>
+              </a:rPr>
+              <a:t>Network.html: </a:t>
+            </a:r>
+            <a:r>
+              <a:rPr lang="hu-HU" sz="1700" dirty="0">
+                <a:effectLst/>
+                <a:latin typeface="Aptos" panose="020B0004020202020204" pitchFamily="34" charset="0"/>
+                <a:ea typeface="Aptos" panose="020B0004020202020204" pitchFamily="34" charset="0"/>
+                <a:cs typeface="Times New Roman" panose="02020603050405020304" pitchFamily="18" charset="0"/>
+              </a:rPr>
+              <a:t>an interactive network figure which shows the Kinase Statistic (LogFC) and the pathways. Nodes and pathways are searchable. Networks help to understand kinases</a:t>
+            </a:r>
+            <a:r>
+              <a:rPr lang="hu-HU" sz="1700" dirty="0">
+                <a:latin typeface="Aptos" panose="020B0004020202020204" pitchFamily="34" charset="0"/>
+                <a:ea typeface="Aptos" panose="020B0004020202020204" pitchFamily="34" charset="0"/>
+                <a:cs typeface="Times New Roman" panose="02020603050405020304" pitchFamily="18" charset="0"/>
+              </a:rPr>
+              <a:t> relationships.</a:t>
+            </a:r>
+            <a:endParaRPr lang="hu-HU" sz="1700" dirty="0">
+              <a:effectLst/>
+              <a:latin typeface="Aptos" panose="020B0004020202020204" pitchFamily="34" charset="0"/>
+              <a:ea typeface="Aptos" panose="020B0004020202020204" pitchFamily="34" charset="0"/>
+              <a:cs typeface="Times New Roman" panose="02020603050405020304" pitchFamily="18" charset="0"/>
+            </a:endParaRPr>
+          </a:p>
+        </p:txBody>
+      </p:sp>
+      <p:sp>
+        <p:nvSpPr>
+          <p:cNvPr id="38" name="TextBox 37">
+            <a:extLst>
+              <a:ext uri="{FF2B5EF4-FFF2-40B4-BE49-F238E27FC236}">
+                <a16:creationId xmlns:a16="http://schemas.microsoft.com/office/drawing/2014/main" id="{494EC193-BEF2-E4DA-E321-B04AAFE39B35}"/>
+              </a:ext>
+            </a:extLst>
+          </p:cNvPr>
+          <p:cNvSpPr txBox="1"/>
+          <p:nvPr/>
+        </p:nvSpPr>
+        <p:spPr>
+          <a:xfrm>
+            <a:off x="6677221" y="4598603"/>
+            <a:ext cx="5244660" cy="1138773"/>
+          </a:xfrm>
+          <a:prstGeom prst="rect">
+            <a:avLst/>
+          </a:prstGeom>
+          <a:noFill/>
+        </p:spPr>
+        <p:txBody>
+          <a:bodyPr wrap="square">
+            <a:spAutoFit/>
+          </a:bodyPr>
+          <a:lstStyle/>
+          <a:p>
+            <a:pPr lvl="0"/>
+            <a:r>
+              <a:rPr lang="hu-HU" sz="1700" dirty="0">
+                <a:effectLst/>
+                <a:latin typeface="Aptos" panose="020B0004020202020204" pitchFamily="34" charset="0"/>
+                <a:ea typeface="Aptos" panose="020B0004020202020204" pitchFamily="34" charset="0"/>
+                <a:cs typeface="Times New Roman" panose="02020603050405020304" pitchFamily="18" charset="0"/>
+              </a:rPr>
+              <a:t>Files:</a:t>
+            </a:r>
+          </a:p>
+          <a:p>
+            <a:pPr lvl="0"/>
+            <a:r>
+              <a:rPr lang="hu-HU" sz="1700" b="1" dirty="0">
+                <a:effectLst/>
+                <a:latin typeface="Aptos" panose="020B0004020202020204" pitchFamily="34" charset="0"/>
+                <a:ea typeface="Aptos" panose="020B0004020202020204" pitchFamily="34" charset="0"/>
+                <a:cs typeface="Times New Roman" panose="02020603050405020304" pitchFamily="18" charset="0"/>
+              </a:rPr>
+              <a:t>Kinase_pathway_heatmaps folder</a:t>
+            </a:r>
+            <a:r>
+              <a:rPr lang="hu-HU" sz="1700" dirty="0">
+                <a:effectLst/>
+                <a:latin typeface="Aptos" panose="020B0004020202020204" pitchFamily="34" charset="0"/>
+                <a:ea typeface="Aptos" panose="020B0004020202020204" pitchFamily="34" charset="0"/>
+                <a:cs typeface="Times New Roman" panose="02020603050405020304" pitchFamily="18" charset="0"/>
+              </a:rPr>
+              <a:t>: </a:t>
+            </a:r>
+            <a:r>
+              <a:rPr lang="hu-HU" sz="1700" dirty="0">
+                <a:solidFill>
+                  <a:srgbClr val="048210"/>
+                </a:solidFill>
+                <a:effectLst/>
+                <a:latin typeface="Aptos" panose="020B0004020202020204" pitchFamily="34" charset="0"/>
+                <a:ea typeface="Aptos" panose="020B0004020202020204" pitchFamily="34" charset="0"/>
+                <a:cs typeface="Times New Roman" panose="02020603050405020304" pitchFamily="18" charset="0"/>
+              </a:rPr>
+              <a:t>start exploring pathways with these figures to assess the change in the pathways across comparisons. </a:t>
+            </a:r>
+            <a:endParaRPr lang="hu-HU" sz="1700" b="1" dirty="0">
+              <a:solidFill>
+                <a:srgbClr val="048210"/>
+              </a:solidFill>
+              <a:effectLst/>
+              <a:latin typeface="Aptos" panose="020B0004020202020204" pitchFamily="34" charset="0"/>
+              <a:ea typeface="Aptos" panose="020B0004020202020204" pitchFamily="34" charset="0"/>
+              <a:cs typeface="Times New Roman" panose="02020603050405020304" pitchFamily="18" charset="0"/>
+            </a:endParaRPr>
+          </a:p>
+        </p:txBody>
+      </p:sp>
+      <p:pic>
+        <p:nvPicPr>
+          <p:cNvPr id="42" name="Picture 41">
+            <a:extLst>
+              <a:ext uri="{FF2B5EF4-FFF2-40B4-BE49-F238E27FC236}">
+                <a16:creationId xmlns:a16="http://schemas.microsoft.com/office/drawing/2014/main" id="{4C90C9AE-EDEB-B803-6700-5843987DC87F}"/>
+              </a:ext>
+            </a:extLst>
+          </p:cNvPr>
+          <p:cNvPicPr>
+            <a:picLocks noChangeAspect="1"/>
+          </p:cNvPicPr>
+          <p:nvPr/>
+        </p:nvPicPr>
+        <p:blipFill>
+          <a:blip r:embed="rId3"/>
+          <a:stretch>
+            <a:fillRect/>
+          </a:stretch>
+        </p:blipFill>
+        <p:spPr>
+          <a:xfrm>
+            <a:off x="7017749" y="2327749"/>
+            <a:ext cx="3963423" cy="2128742"/>
+          </a:xfrm>
+          <a:prstGeom prst="rect">
+            <a:avLst/>
+          </a:prstGeom>
+        </p:spPr>
+      </p:pic>
+      <p:sp>
+        <p:nvSpPr>
+          <p:cNvPr id="47" name="TextBox 46">
+            <a:extLst>
+              <a:ext uri="{FF2B5EF4-FFF2-40B4-BE49-F238E27FC236}">
+                <a16:creationId xmlns:a16="http://schemas.microsoft.com/office/drawing/2014/main" id="{13CD6A7B-538E-6B71-82A4-CA3E5CBE7D25}"/>
+              </a:ext>
+            </a:extLst>
+          </p:cNvPr>
+          <p:cNvSpPr txBox="1"/>
+          <p:nvPr/>
+        </p:nvSpPr>
+        <p:spPr>
+          <a:xfrm>
+            <a:off x="7869077" y="2151793"/>
+            <a:ext cx="1629103" cy="307777"/>
+          </a:xfrm>
+          <a:prstGeom prst="rect">
+            <a:avLst/>
+          </a:prstGeom>
+          <a:noFill/>
+        </p:spPr>
+        <p:txBody>
+          <a:bodyPr wrap="square">
+            <a:spAutoFit/>
+          </a:bodyPr>
+          <a:lstStyle/>
+          <a:p>
+            <a:r>
+              <a:rPr lang="hu-HU" sz="1400" dirty="0">
+                <a:effectLst/>
+                <a:latin typeface="Aptos" panose="020B0004020202020204" pitchFamily="34" charset="0"/>
+                <a:ea typeface="Aptos" panose="020B0004020202020204" pitchFamily="34" charset="0"/>
+                <a:cs typeface="Times New Roman" panose="02020603050405020304" pitchFamily="18" charset="0"/>
+              </a:rPr>
+              <a:t>Sensitive – T vs C</a:t>
+            </a:r>
+            <a:endParaRPr lang="en-NL" sz="1400" dirty="0"/>
+          </a:p>
+        </p:txBody>
+      </p:sp>
+      <p:sp>
+        <p:nvSpPr>
+          <p:cNvPr id="48" name="TextBox 47">
+            <a:extLst>
+              <a:ext uri="{FF2B5EF4-FFF2-40B4-BE49-F238E27FC236}">
+                <a16:creationId xmlns:a16="http://schemas.microsoft.com/office/drawing/2014/main" id="{B5D31717-E70B-5151-3CFE-C2BC822BE264}"/>
+              </a:ext>
+            </a:extLst>
+          </p:cNvPr>
+          <p:cNvSpPr txBox="1"/>
+          <p:nvPr/>
+        </p:nvSpPr>
+        <p:spPr>
+          <a:xfrm>
+            <a:off x="9498180" y="2144996"/>
+            <a:ext cx="1629103" cy="307777"/>
+          </a:xfrm>
+          <a:prstGeom prst="rect">
+            <a:avLst/>
+          </a:prstGeom>
+          <a:noFill/>
+        </p:spPr>
+        <p:txBody>
+          <a:bodyPr wrap="square">
+            <a:spAutoFit/>
+          </a:bodyPr>
+          <a:lstStyle/>
+          <a:p>
+            <a:r>
+              <a:rPr lang="hu-HU" sz="1400" dirty="0">
+                <a:effectLst/>
+                <a:latin typeface="Aptos" panose="020B0004020202020204" pitchFamily="34" charset="0"/>
+                <a:ea typeface="Aptos" panose="020B0004020202020204" pitchFamily="34" charset="0"/>
+                <a:cs typeface="Times New Roman" panose="02020603050405020304" pitchFamily="18" charset="0"/>
+              </a:rPr>
+              <a:t>Resistant – T vs C</a:t>
+            </a:r>
+            <a:endParaRPr lang="en-NL" sz="1400" dirty="0"/>
+          </a:p>
+        </p:txBody>
+      </p:sp>
     </p:spTree>
     <p:extLst>
       <p:ext uri="{BB962C8B-B14F-4D97-AF65-F5344CB8AC3E}">
-        <p14:creationId xmlns:p14="http://schemas.microsoft.com/office/powerpoint/2010/main" val="3992369716"/>
+        <p14:creationId xmlns:p14="http://schemas.microsoft.com/office/powerpoint/2010/main" val="2773925"/>
       </p:ext>
     </p:extLst>
   </p:cSld>
@@ -2522,7 +3845,7 @@
                 </a:solidFill>
                 <a:latin typeface="Aptos" panose="020B0004020202020204" pitchFamily="34" charset="0"/>
               </a:rPr>
-              <a:t>selected nodes</a:t>
+              <a:t>selected nodes from UKA</a:t>
             </a:r>
             <a:endParaRPr lang="en-NL" sz="1600" dirty="0">
               <a:solidFill>
@@ -4771,7 +6094,7 @@
                 <a:lstStyle/>
                 <a:p>
                   <a:pPr algn="ctr"/>
-                  <a:endParaRPr lang="en-NL"/>
+                  <a:endParaRPr lang="en-NL" dirty="0"/>
                 </a:p>
               </p:txBody>
             </p:sp>
@@ -5776,7 +7099,7 @@
                 <a:ea typeface="Calibri Light" panose="020F0302020204030204" pitchFamily="34" charset="0"/>
                 <a:cs typeface="Calibri Light" panose="020F0302020204030204" pitchFamily="34" charset="0"/>
               </a:rPr>
-              <a:t>How to select most relevant pathways</a:t>
+              <a:t>How to select most relevant pathways?</a:t>
             </a:r>
             <a:endParaRPr lang="en-NL" sz="4000" dirty="0">
               <a:latin typeface="Calibri Light" panose="020F0302020204030204" pitchFamily="34" charset="0"/>
@@ -5801,7 +7124,7 @@
         <p:spPr>
           <a:xfrm>
             <a:off x="301855" y="1026123"/>
-            <a:ext cx="5174035" cy="3293209"/>
+            <a:ext cx="5447304" cy="3754874"/>
           </a:xfrm>
           <a:prstGeom prst="rect">
             <a:avLst/>
@@ -5815,21 +7138,21 @@
           <a:lstStyle/>
           <a:p>
             <a:r>
-              <a:rPr lang="hu-HU" sz="1600" b="1" dirty="0">
+              <a:rPr lang="hu-HU" sz="1700" b="1" dirty="0">
                 <a:effectLst/>
                 <a:latin typeface="Aptos" panose="020B0004020202020204" pitchFamily="34" charset="0"/>
                 <a:ea typeface="Aptos" panose="020B0004020202020204" pitchFamily="34" charset="0"/>
                 <a:cs typeface="Times New Roman" panose="02020603050405020304" pitchFamily="18" charset="0"/>
               </a:rPr>
-              <a:t>The Enrich_results</a:t>
-            </a:r>
-            <a:r>
-              <a:rPr lang="hu-HU" sz="1600" b="1" dirty="0">
+              <a:t>Use the Pathways_&lt;T vs C&gt;</a:t>
+            </a:r>
+            <a:r>
+              <a:rPr lang="hu-HU" sz="1700" b="1" dirty="0">
                 <a:latin typeface="Aptos" panose="020B0004020202020204" pitchFamily="34" charset="0"/>
                 <a:ea typeface="Aptos" panose="020B0004020202020204" pitchFamily="34" charset="0"/>
                 <a:cs typeface="Times New Roman" panose="02020603050405020304" pitchFamily="18" charset="0"/>
               </a:rPr>
-              <a:t>.csv holds information about the pathways annotated to the network clusters.</a:t>
+              <a:t>.csv:</a:t>
             </a:r>
           </a:p>
           <a:p>
@@ -5838,7 +7161,7 @@
               <a:buChar char="•"/>
             </a:pPr>
             <a:r>
-              <a:rPr lang="hu-HU" sz="1600" dirty="0">
+              <a:rPr lang="hu-HU" sz="1700" dirty="0">
                 <a:latin typeface="Aptos" panose="020B0004020202020204" pitchFamily="34" charset="0"/>
                 <a:cs typeface="Times New Roman" panose="02020603050405020304" pitchFamily="18" charset="0"/>
               </a:rPr>
@@ -5851,57 +7174,52 @@
               <a:buChar char="•"/>
             </a:pPr>
             <a:r>
-              <a:rPr lang="hu-HU" sz="1600" i="1" dirty="0">
+              <a:rPr lang="hu-HU" sz="1700" dirty="0">
                 <a:latin typeface="Aptos" panose="020B0004020202020204" pitchFamily="34" charset="0"/>
                 <a:cs typeface="Times New Roman" panose="02020603050405020304" pitchFamily="18" charset="0"/>
               </a:rPr>
-              <a:t>Hierarchy_n column</a:t>
-            </a:r>
-            <a:r>
-              <a:rPr lang="hu-HU" sz="1600" dirty="0">
-                <a:latin typeface="Aptos" panose="020B0004020202020204" pitchFamily="34" charset="0"/>
-                <a:cs typeface="Times New Roman" panose="02020603050405020304" pitchFamily="18" charset="0"/>
-              </a:rPr>
-              <a:t>: shows the hierarchy level (e.g. Signal Transduction is level 1). This </a:t>
-            </a:r>
-            <a:r>
-              <a:rPr lang="hu-HU" sz="1600" i="1" dirty="0">
-                <a:latin typeface="Aptos" panose="020B0004020202020204" pitchFamily="34" charset="0"/>
-                <a:cs typeface="Times New Roman" panose="02020603050405020304" pitchFamily="18" charset="0"/>
-              </a:rPr>
-              <a:t>helps to identify the most relevant pathways</a:t>
-            </a:r>
-            <a:r>
-              <a:rPr lang="hu-HU" sz="1600" dirty="0">
-                <a:latin typeface="Aptos" panose="020B0004020202020204" pitchFamily="34" charset="0"/>
-                <a:cs typeface="Times New Roman" panose="02020603050405020304" pitchFamily="18" charset="0"/>
-              </a:rPr>
-              <a:t>: usually top levels are too generic and bottom levels might be better.</a:t>
+              <a:t>These columns can help to identify relevant pathways:</a:t>
             </a:r>
           </a:p>
           <a:p>
-            <a:pPr marL="285750" indent="-285750">
+            <a:pPr marL="742950" lvl="1" indent="-285750">
               <a:buFont typeface="Arial" panose="020B0604020202020204" pitchFamily="34" charset="0"/>
               <a:buChar char="•"/>
             </a:pPr>
             <a:r>
-              <a:rPr lang="hu-HU" sz="1600" i="1" dirty="0">
+              <a:rPr lang="hu-HU" sz="1700" i="1" dirty="0">
                 <a:latin typeface="Aptos" panose="020B0004020202020204" pitchFamily="34" charset="0"/>
                 <a:cs typeface="Times New Roman" panose="02020603050405020304" pitchFamily="18" charset="0"/>
               </a:rPr>
-              <a:t>Overlaps column</a:t>
-            </a:r>
-            <a:r>
-              <a:rPr lang="hu-HU" sz="1600" dirty="0">
+              <a:t>N_hits, pathway_size, overlap columns</a:t>
+            </a:r>
+            <a:r>
+              <a:rPr lang="hu-HU" sz="1700" dirty="0">
                 <a:latin typeface="Aptos" panose="020B0004020202020204" pitchFamily="34" charset="0"/>
                 <a:cs typeface="Times New Roman" panose="02020603050405020304" pitchFamily="18" charset="0"/>
               </a:rPr>
-              <a:t> can also help to assess pathway relevance. It shows how many pathway members are in the data (e.g. 3/10 means 3 kinases from the UKA results are found in a pathway of 10 members). (This column might be misformatted in Excel!)</a:t>
-            </a:r>
-            <a:endParaRPr lang="hu-HU" sz="1600" b="1" i="1" dirty="0">
-              <a:latin typeface="Aptos" panose="020B0004020202020204" pitchFamily="34" charset="0"/>
-              <a:cs typeface="Times New Roman" panose="02020603050405020304" pitchFamily="18" charset="0"/>
-            </a:endParaRPr>
+              <a:t> show how many pathway members are in the data. (e.g. n_hits = 3, pathway_size = 10 means 3 kinases from the results are found in a pathway of 10 members). </a:t>
+            </a:r>
+          </a:p>
+          <a:p>
+            <a:pPr marL="742950" lvl="1" indent="-285750">
+              <a:buFont typeface="Arial" panose="020B0604020202020204" pitchFamily="34" charset="0"/>
+              <a:buChar char="•"/>
+            </a:pPr>
+            <a:r>
+              <a:rPr lang="hu-HU" sz="1700" i="1" dirty="0">
+                <a:latin typeface="Aptos" panose="020B0004020202020204" pitchFamily="34" charset="0"/>
+                <a:cs typeface="Times New Roman" panose="02020603050405020304" pitchFamily="18" charset="0"/>
+              </a:rPr>
+              <a:t>Hierarchy_n column</a:t>
+            </a:r>
+            <a:r>
+              <a:rPr lang="hu-HU" sz="1700" dirty="0">
+                <a:latin typeface="Aptos" panose="020B0004020202020204" pitchFamily="34" charset="0"/>
+                <a:cs typeface="Times New Roman" panose="02020603050405020304" pitchFamily="18" charset="0"/>
+              </a:rPr>
+              <a:t>: shows the hierarchy level (e.g. Signal Transduction is level 1). Top levels are generic, bottom levels are specific. Middle levels might be the most interesting.</a:t>
+            </a:r>
           </a:p>
         </p:txBody>
       </p:sp>
@@ -5927,7 +7245,7 @@
         </p:blipFill>
         <p:spPr>
           <a:xfrm>
-            <a:off x="5911275" y="988691"/>
+            <a:off x="6096000" y="1308507"/>
             <a:ext cx="5629083" cy="3255777"/>
           </a:xfrm>
           <a:prstGeom prst="rect">
@@ -5942,10 +7260,10 @@
       </p:pic>
       <p:sp>
         <p:nvSpPr>
-          <p:cNvPr id="7" name="TextBox 6">
+          <p:cNvPr id="4" name="TextBox 3">
             <a:extLst>
               <a:ext uri="{FF2B5EF4-FFF2-40B4-BE49-F238E27FC236}">
-                <a16:creationId xmlns:a16="http://schemas.microsoft.com/office/drawing/2014/main" id="{6CB20D9A-F059-705F-2EF6-761BDFADC260}"/>
+                <a16:creationId xmlns:a16="http://schemas.microsoft.com/office/drawing/2014/main" id="{3AFD4385-3B52-8D6B-F323-A4BD8416C6B7}"/>
               </a:ext>
             </a:extLst>
           </p:cNvPr>
@@ -5954,18 +7272,13 @@
         </p:nvSpPr>
         <p:spPr>
           <a:xfrm>
-            <a:off x="187814" y="4533915"/>
-            <a:ext cx="11816372" cy="1815882"/>
+            <a:off x="301855" y="5103302"/>
+            <a:ext cx="11353917" cy="1138773"/>
           </a:xfrm>
           <a:prstGeom prst="rect">
             <a:avLst/>
           </a:prstGeom>
           <a:noFill/>
-          <a:ln>
-            <a:solidFill>
-              <a:schemeClr val="tx1"/>
-            </a:solidFill>
-          </a:ln>
         </p:spPr>
         <p:txBody>
           <a:bodyPr wrap="square">
@@ -5974,90 +7287,92 @@
           <a:lstStyle/>
           <a:p>
             <a:r>
-              <a:rPr lang="hu-HU" sz="1600" b="1" dirty="0">
-                <a:solidFill>
-                  <a:srgbClr val="048210"/>
-                </a:solidFill>
-                <a:latin typeface="Aptos" panose="020B0004020202020204" pitchFamily="34" charset="0"/>
-              </a:rPr>
-              <a:t>Which are the most relevant pathways?</a:t>
-            </a:r>
-          </a:p>
-          <a:p>
-            <a:r>
-              <a:rPr lang="en-GB" sz="1600" dirty="0">
-                <a:solidFill>
-                  <a:srgbClr val="048210"/>
-                </a:solidFill>
-                <a:latin typeface="Aptos" panose="020B0004020202020204" pitchFamily="34" charset="0"/>
-              </a:rPr>
-              <a:t>There is no simple metric. Pathways </a:t>
-            </a:r>
-            <a:r>
-              <a:rPr lang="hu-HU" sz="1600" dirty="0">
-                <a:solidFill>
-                  <a:srgbClr val="048210"/>
-                </a:solidFill>
-                <a:latin typeface="Aptos" panose="020B0004020202020204" pitchFamily="34" charset="0"/>
-              </a:rPr>
-              <a:t>usually </a:t>
-            </a:r>
-            <a:r>
-              <a:rPr lang="en-GB" sz="1600" dirty="0">
-                <a:solidFill>
-                  <a:srgbClr val="048210"/>
-                </a:solidFill>
-                <a:latin typeface="Aptos" panose="020B0004020202020204" pitchFamily="34" charset="0"/>
-              </a:rPr>
-              <a:t>share members, and a pathway that is relevant in one model may be irrelevant in another.</a:t>
-            </a:r>
-            <a:br>
-              <a:rPr lang="en-GB" sz="1600" dirty="0">
-                <a:solidFill>
-                  <a:srgbClr val="048210"/>
-                </a:solidFill>
-                <a:latin typeface="Aptos" panose="020B0004020202020204" pitchFamily="34" charset="0"/>
-              </a:rPr>
-            </a:br>
-            <a:r>
-              <a:rPr lang="en-GB" sz="1600" dirty="0">
-                <a:solidFill>
-                  <a:srgbClr val="048210"/>
-                </a:solidFill>
-                <a:latin typeface="Aptos" panose="020B0004020202020204" pitchFamily="34" charset="0"/>
-              </a:rPr>
-              <a:t>In addition, statistical tests do not consider how specific members are to a pathway. As a result, a pathway may receive a strong p-value even if only non-specific members are detected.</a:t>
-            </a:r>
-            <a:endParaRPr lang="hu-HU" sz="1600" dirty="0">
-              <a:solidFill>
-                <a:srgbClr val="048210"/>
-              </a:solidFill>
+              <a:rPr lang="en-GB" sz="1700" dirty="0">
+                <a:latin typeface="Aptos" panose="020B0004020202020204" pitchFamily="34" charset="0"/>
+                <a:cs typeface="Times New Roman" panose="02020603050405020304" pitchFamily="18" charset="0"/>
+              </a:rPr>
+              <a:t>The </a:t>
+            </a:r>
+            <a:r>
+              <a:rPr lang="en-GB" sz="1700" b="1" dirty="0">
+                <a:latin typeface="Aptos" panose="020B0004020202020204" pitchFamily="34" charset="0"/>
+                <a:cs typeface="Times New Roman" panose="02020603050405020304" pitchFamily="18" charset="0"/>
+              </a:rPr>
+              <a:t>Pathways_&lt;T vs C&gt;.csv </a:t>
+            </a:r>
+            <a:r>
+              <a:rPr lang="en-GB" sz="1700" dirty="0">
+                <a:latin typeface="Aptos" panose="020B0004020202020204" pitchFamily="34" charset="0"/>
+                <a:cs typeface="Times New Roman" panose="02020603050405020304" pitchFamily="18" charset="0"/>
+              </a:rPr>
+              <a:t>file lists the selected pathway</a:t>
+            </a:r>
+            <a:r>
+              <a:rPr lang="hu-HU" sz="1700" dirty="0">
+                <a:latin typeface="Aptos" panose="020B0004020202020204" pitchFamily="34" charset="0"/>
+                <a:cs typeface="Times New Roman" panose="02020603050405020304" pitchFamily="18" charset="0"/>
+              </a:rPr>
+              <a:t>s</a:t>
+            </a:r>
+            <a:r>
+              <a:rPr lang="en-GB" sz="1700" dirty="0">
+                <a:latin typeface="Aptos" panose="020B0004020202020204" pitchFamily="34" charset="0"/>
+                <a:cs typeface="Times New Roman" panose="02020603050405020304" pitchFamily="18" charset="0"/>
+              </a:rPr>
+              <a:t> for each gene cluster (column Genes). However, additional pathways may also be annotated to the same gene cluster. In this file, the pathway chosen is the highest in the hierarchy (i.e., the most general). </a:t>
+            </a:r>
+            <a:r>
+              <a:rPr lang="hu-HU" sz="1700" dirty="0">
+                <a:latin typeface="Aptos" panose="020B0004020202020204" pitchFamily="34" charset="0"/>
+                <a:cs typeface="Times New Roman" panose="02020603050405020304" pitchFamily="18" charset="0"/>
+              </a:rPr>
+              <a:t>If a pathway is irrelevant, use </a:t>
+            </a:r>
+            <a:r>
+              <a:rPr lang="en-GB" sz="1700" b="1" dirty="0">
+                <a:latin typeface="Aptos" panose="020B0004020202020204" pitchFamily="34" charset="0"/>
+                <a:cs typeface="Times New Roman" panose="02020603050405020304" pitchFamily="18" charset="0"/>
+              </a:rPr>
+              <a:t>Pathways_&lt;T vs C&gt;_all.csv</a:t>
+            </a:r>
+            <a:r>
+              <a:rPr lang="hu-HU" sz="1700" b="1" dirty="0">
+                <a:latin typeface="Aptos" panose="020B0004020202020204" pitchFamily="34" charset="0"/>
+                <a:cs typeface="Times New Roman" panose="02020603050405020304" pitchFamily="18" charset="0"/>
+              </a:rPr>
+              <a:t> </a:t>
+            </a:r>
+            <a:r>
+              <a:rPr lang="hu-HU" sz="1700" dirty="0">
+                <a:latin typeface="Aptos" panose="020B0004020202020204" pitchFamily="34" charset="0"/>
+                <a:cs typeface="Times New Roman" panose="02020603050405020304" pitchFamily="18" charset="0"/>
+              </a:rPr>
+              <a:t>to check whether there is another, more </a:t>
+            </a:r>
+            <a:r>
+              <a:rPr lang="en-GB" sz="1700" dirty="0">
+                <a:latin typeface="Aptos" panose="020B0004020202020204" pitchFamily="34" charset="0"/>
+                <a:cs typeface="Times New Roman" panose="02020603050405020304" pitchFamily="18" charset="0"/>
+              </a:rPr>
+              <a:t>relevant pathway</a:t>
+            </a:r>
+            <a:r>
+              <a:rPr lang="hu-HU" sz="1700" dirty="0">
+                <a:latin typeface="Aptos" panose="020B0004020202020204" pitchFamily="34" charset="0"/>
+                <a:cs typeface="Times New Roman" panose="02020603050405020304" pitchFamily="18" charset="0"/>
+              </a:rPr>
+              <a:t> </a:t>
+            </a:r>
+            <a:r>
+              <a:rPr lang="en-GB" sz="1700" dirty="0">
+                <a:latin typeface="Aptos" panose="020B0004020202020204" pitchFamily="34" charset="0"/>
+                <a:cs typeface="Times New Roman" panose="02020603050405020304" pitchFamily="18" charset="0"/>
+              </a:rPr>
+              <a:t>for the same gene cluster.</a:t>
+            </a:r>
+            <a:endParaRPr lang="hu-HU" sz="1700" dirty="0">
               <a:latin typeface="Aptos" panose="020B0004020202020204" pitchFamily="34" charset="0"/>
-            </a:endParaRPr>
-          </a:p>
-          <a:p>
-            <a:endParaRPr lang="hu-HU" sz="1600" b="1" dirty="0">
-              <a:solidFill>
-                <a:srgbClr val="048210"/>
-              </a:solidFill>
-              <a:latin typeface="Aptos" panose="020B0004020202020204" pitchFamily="34" charset="0"/>
-            </a:endParaRPr>
-          </a:p>
-          <a:p>
-            <a:r>
-              <a:rPr lang="en-GB" sz="1600" b="1" dirty="0">
-                <a:solidFill>
-                  <a:srgbClr val="048210"/>
-                </a:solidFill>
-                <a:latin typeface="Aptos" panose="020B0004020202020204" pitchFamily="34" charset="0"/>
-              </a:rPr>
-              <a:t>Therefore, we recommend assessing pathway relevance using biological domain knowledge rather than relying on p-values or combined scores.</a:t>
-            </a:r>
-            <a:endParaRPr lang="en-NL" sz="1600" b="1" dirty="0">
-              <a:solidFill>
-                <a:srgbClr val="048210"/>
-              </a:solidFill>
-              <a:latin typeface="Aptos" panose="020B0004020202020204" pitchFamily="34" charset="0"/>
+              <a:cs typeface="Times New Roman" panose="02020603050405020304" pitchFamily="18" charset="0"/>
             </a:endParaRPr>
           </a:p>
         </p:txBody>
@@ -6076,6 +7391,225 @@
 </file>
 
 <file path=ppt/slides/slide5.xml><?xml version="1.0" encoding="utf-8"?>
+<p:sld xmlns:a="http://schemas.openxmlformats.org/drawingml/2006/main" xmlns:r="http://schemas.openxmlformats.org/officeDocument/2006/relationships" xmlns:p="http://schemas.openxmlformats.org/presentationml/2006/main">
+  <p:cSld>
+    <p:spTree>
+      <p:nvGrpSpPr>
+        <p:cNvPr id="1" name=""/>
+        <p:cNvGrpSpPr/>
+        <p:nvPr/>
+      </p:nvGrpSpPr>
+      <p:grpSpPr>
+        <a:xfrm>
+          <a:off x="0" y="0"/>
+          <a:ext cx="0" cy="0"/>
+          <a:chOff x="0" y="0"/>
+          <a:chExt cx="0" cy="0"/>
+        </a:xfrm>
+      </p:grpSpPr>
+      <p:sp>
+        <p:nvSpPr>
+          <p:cNvPr id="2" name="Content Placeholder 1">
+            <a:extLst>
+              <a:ext uri="{FF2B5EF4-FFF2-40B4-BE49-F238E27FC236}">
+                <a16:creationId xmlns:a16="http://schemas.microsoft.com/office/drawing/2014/main" id="{D77C77CF-B501-EFED-BF6F-471A28E1300E}"/>
+              </a:ext>
+            </a:extLst>
+          </p:cNvPr>
+          <p:cNvSpPr>
+            <a:spLocks noGrp="1"/>
+          </p:cNvSpPr>
+          <p:nvPr>
+            <p:ph sz="quarter" idx="11"/>
+          </p:nvPr>
+        </p:nvSpPr>
+        <p:spPr/>
+        <p:txBody>
+          <a:bodyPr/>
+          <a:lstStyle/>
+          <a:p>
+            <a:endParaRPr lang="en-NL"/>
+          </a:p>
+        </p:txBody>
+      </p:sp>
+      <p:sp>
+        <p:nvSpPr>
+          <p:cNvPr id="7" name="TextBox 6">
+            <a:extLst>
+              <a:ext uri="{FF2B5EF4-FFF2-40B4-BE49-F238E27FC236}">
+                <a16:creationId xmlns:a16="http://schemas.microsoft.com/office/drawing/2014/main" id="{6CB20D9A-F059-705F-2EF6-761BDFADC260}"/>
+              </a:ext>
+            </a:extLst>
+          </p:cNvPr>
+          <p:cNvSpPr txBox="1"/>
+          <p:nvPr/>
+        </p:nvSpPr>
+        <p:spPr>
+          <a:xfrm>
+            <a:off x="375628" y="1864288"/>
+            <a:ext cx="11185751" cy="2308324"/>
+          </a:xfrm>
+          <a:prstGeom prst="rect">
+            <a:avLst/>
+          </a:prstGeom>
+          <a:noFill/>
+          <a:ln>
+            <a:solidFill>
+              <a:schemeClr val="tx1"/>
+            </a:solidFill>
+          </a:ln>
+        </p:spPr>
+        <p:txBody>
+          <a:bodyPr wrap="square">
+            <a:spAutoFit/>
+          </a:bodyPr>
+          <a:lstStyle/>
+          <a:p>
+            <a:r>
+              <a:rPr lang="hu-HU" b="1" dirty="0">
+                <a:solidFill>
+                  <a:srgbClr val="048210"/>
+                </a:solidFill>
+                <a:latin typeface="Aptos" panose="020B0004020202020204" pitchFamily="34" charset="0"/>
+              </a:rPr>
+              <a:t>Which are the most relevant pathways?</a:t>
+            </a:r>
+          </a:p>
+          <a:p>
+            <a:r>
+              <a:rPr lang="en-GB" dirty="0">
+                <a:solidFill>
+                  <a:srgbClr val="048210"/>
+                </a:solidFill>
+                <a:latin typeface="Aptos" panose="020B0004020202020204" pitchFamily="34" charset="0"/>
+              </a:rPr>
+              <a:t>There is no simple metric. Pathways </a:t>
+            </a:r>
+            <a:r>
+              <a:rPr lang="hu-HU" dirty="0">
+                <a:solidFill>
+                  <a:srgbClr val="048210"/>
+                </a:solidFill>
+                <a:latin typeface="Aptos" panose="020B0004020202020204" pitchFamily="34" charset="0"/>
+              </a:rPr>
+              <a:t>usually </a:t>
+            </a:r>
+            <a:r>
+              <a:rPr lang="en-GB" dirty="0">
+                <a:solidFill>
+                  <a:srgbClr val="048210"/>
+                </a:solidFill>
+                <a:latin typeface="Aptos" panose="020B0004020202020204" pitchFamily="34" charset="0"/>
+              </a:rPr>
+              <a:t>share members, and a pathway that is relevant in one model may be irrelevant in another.</a:t>
+            </a:r>
+            <a:br>
+              <a:rPr lang="en-GB" dirty="0">
+                <a:solidFill>
+                  <a:srgbClr val="048210"/>
+                </a:solidFill>
+                <a:latin typeface="Aptos" panose="020B0004020202020204" pitchFamily="34" charset="0"/>
+              </a:rPr>
+            </a:br>
+            <a:r>
+              <a:rPr lang="en-GB" dirty="0">
+                <a:solidFill>
+                  <a:srgbClr val="048210"/>
+                </a:solidFill>
+                <a:latin typeface="Aptos" panose="020B0004020202020204" pitchFamily="34" charset="0"/>
+              </a:rPr>
+              <a:t>In addition, statistical tests do not consider how specific members are to a pathway. As a result, a pathway may receive a strong p-value even if only non-specific members are detected.</a:t>
+            </a:r>
+            <a:endParaRPr lang="hu-HU" dirty="0">
+              <a:solidFill>
+                <a:srgbClr val="048210"/>
+              </a:solidFill>
+              <a:latin typeface="Aptos" panose="020B0004020202020204" pitchFamily="34" charset="0"/>
+            </a:endParaRPr>
+          </a:p>
+          <a:p>
+            <a:endParaRPr lang="hu-HU" b="1" dirty="0">
+              <a:solidFill>
+                <a:srgbClr val="048210"/>
+              </a:solidFill>
+              <a:latin typeface="Aptos" panose="020B0004020202020204" pitchFamily="34" charset="0"/>
+            </a:endParaRPr>
+          </a:p>
+          <a:p>
+            <a:r>
+              <a:rPr lang="en-GB" b="1" dirty="0">
+                <a:solidFill>
+                  <a:srgbClr val="048210"/>
+                </a:solidFill>
+                <a:latin typeface="Aptos" panose="020B0004020202020204" pitchFamily="34" charset="0"/>
+              </a:rPr>
+              <a:t>Therefore, we recommend assessing pathway relevance using biological domain knowledge rather than relying on p-values or combined scores.</a:t>
+            </a:r>
+            <a:endParaRPr lang="en-NL" b="1" dirty="0">
+              <a:solidFill>
+                <a:srgbClr val="048210"/>
+              </a:solidFill>
+              <a:latin typeface="Aptos" panose="020B0004020202020204" pitchFamily="34" charset="0"/>
+            </a:endParaRPr>
+          </a:p>
+        </p:txBody>
+      </p:sp>
+      <p:sp>
+        <p:nvSpPr>
+          <p:cNvPr id="5" name="Content Placeholder 2">
+            <a:extLst>
+              <a:ext uri="{FF2B5EF4-FFF2-40B4-BE49-F238E27FC236}">
+                <a16:creationId xmlns:a16="http://schemas.microsoft.com/office/drawing/2014/main" id="{AA59A07A-076D-44BD-99DB-E29ECB8B5A83}"/>
+              </a:ext>
+            </a:extLst>
+          </p:cNvPr>
+          <p:cNvSpPr>
+            <a:spLocks noGrp="1"/>
+          </p:cNvSpPr>
+          <p:nvPr>
+            <p:ph sz="quarter" idx="12"/>
+          </p:nvPr>
+        </p:nvSpPr>
+        <p:spPr>
+          <a:xfrm>
+            <a:off x="524124" y="-26140"/>
+            <a:ext cx="8571238" cy="636442"/>
+          </a:xfrm>
+        </p:spPr>
+        <p:txBody>
+          <a:bodyPr/>
+          <a:lstStyle/>
+          <a:p>
+            <a:r>
+              <a:rPr lang="hu-HU" sz="4000" dirty="0">
+                <a:latin typeface="Calibri Light" panose="020F0302020204030204" pitchFamily="34" charset="0"/>
+                <a:ea typeface="Calibri Light" panose="020F0302020204030204" pitchFamily="34" charset="0"/>
+                <a:cs typeface="Calibri Light" panose="020F0302020204030204" pitchFamily="34" charset="0"/>
+              </a:rPr>
+              <a:t>How to select most relevant pathways?</a:t>
+            </a:r>
+            <a:endParaRPr lang="en-NL" sz="4000" dirty="0">
+              <a:latin typeface="Calibri Light" panose="020F0302020204030204" pitchFamily="34" charset="0"/>
+              <a:ea typeface="Calibri Light" panose="020F0302020204030204" pitchFamily="34" charset="0"/>
+              <a:cs typeface="Calibri Light" panose="020F0302020204030204" pitchFamily="34" charset="0"/>
+            </a:endParaRPr>
+          </a:p>
+        </p:txBody>
+      </p:sp>
+    </p:spTree>
+    <p:extLst>
+      <p:ext uri="{BB962C8B-B14F-4D97-AF65-F5344CB8AC3E}">
+        <p14:creationId xmlns:p14="http://schemas.microsoft.com/office/powerpoint/2010/main" val="4176546777"/>
+      </p:ext>
+    </p:extLst>
+  </p:cSld>
+  <p:clrMapOvr>
+    <a:masterClrMapping/>
+  </p:clrMapOvr>
+</p:sld>
+</file>
+
+<file path=ppt/slides/slide6.xml><?xml version="1.0" encoding="utf-8"?>
 <p:sld xmlns:a="http://schemas.openxmlformats.org/drawingml/2006/main" xmlns:r="http://schemas.openxmlformats.org/officeDocument/2006/relationships" xmlns:p="http://schemas.openxmlformats.org/presentationml/2006/main">
   <p:cSld>
     <p:spTree>
@@ -6361,7 +7895,7 @@
 </p:sld>
 </file>
 
-<file path=ppt/slides/slide6.xml><?xml version="1.0" encoding="utf-8"?>
+<file path=ppt/slides/slide7.xml><?xml version="1.0" encoding="utf-8"?>
 <p:sld xmlns:a="http://schemas.openxmlformats.org/drawingml/2006/main" xmlns:r="http://schemas.openxmlformats.org/officeDocument/2006/relationships" xmlns:p="http://schemas.openxmlformats.org/presentationml/2006/main">
   <p:cSld>
     <p:spTree>
@@ -6443,8 +7977,8 @@
           </a:p>
         </p:txBody>
       </p:sp>
-      <mc:AlternateContent xmlns:mc="http://schemas.openxmlformats.org/markup-compatibility/2006" xmlns:a14="http://schemas.microsoft.com/office/drawing/2010/main">
-        <mc:Choice Requires="a14">
+      <mc:AlternateContent xmlns:mc="http://schemas.openxmlformats.org/markup-compatibility/2006">
+        <mc:Choice xmlns:a14="http://schemas.microsoft.com/office/drawing/2010/main" Requires="a14">
           <p:sp>
             <p:nvSpPr>
               <p:cNvPr id="4" name="TextBox 3">
@@ -6459,7 +7993,7 @@
             </p:nvSpPr>
             <p:spPr>
               <a:xfrm>
-                <a:off x="375628" y="860316"/>
+                <a:off x="375628" y="1217667"/>
                 <a:ext cx="10391775" cy="2551468"/>
               </a:xfrm>
               <a:prstGeom prst="rect">
@@ -6734,7 +8268,7 @@
             </p:txBody>
           </p:sp>
         </mc:Choice>
-        <mc:Fallback xmlns="">
+        <mc:Fallback>
           <p:sp>
             <p:nvSpPr>
               <p:cNvPr id="4" name="TextBox 3">
@@ -6751,7 +8285,7 @@
             </p:nvSpPr>
             <p:spPr>
               <a:xfrm>
-                <a:off x="375628" y="860316"/>
+                <a:off x="375628" y="1217667"/>
                 <a:ext cx="10391775" cy="2551468"/>
               </a:xfrm>
               <a:prstGeom prst="rect">
@@ -6760,7 +8294,7 @@
               <a:blipFill>
                 <a:blip r:embed="rId3"/>
                 <a:stretch>
-                  <a:fillRect l="-235" t="-239" b="-1909"/>
+                  <a:fillRect l="-235" t="-478" b="-1914"/>
                 </a:stretch>
               </a:blipFill>
             </p:spPr>
@@ -6792,7 +8326,7 @@
 </p:sld>
 </file>
 
-<file path=ppt/slides/slide7.xml><?xml version="1.0" encoding="utf-8"?>
+<file path=ppt/slides/slide8.xml><?xml version="1.0" encoding="utf-8"?>
 <p:sld xmlns:a="http://schemas.openxmlformats.org/drawingml/2006/main" xmlns:r="http://schemas.openxmlformats.org/officeDocument/2006/relationships" xmlns:p="http://schemas.openxmlformats.org/presentationml/2006/main">
   <p:cSld>
     <p:spTree>
